--- a/proposals/機種分析/北斗の拳/hokuto_analysis.pptx
+++ b/proposals/機種分析/北斗の拳/hokuto_analysis.pptx
@@ -12,6 +12,7 @@
     <p:sldId id="260" r:id="rId11"/>
     <p:sldId id="261" r:id="rId12"/>
     <p:sldId id="262" r:id="rId13"/>
+    <p:sldId id="263" r:id="rId14"/>
   </p:sldIdLst>
   <p:sldSz cx="9144000" cy="5143500" type="screen4x3"/>
   <p:notesSz cx="6858000" cy="9144000"/>
@@ -8661,8 +8662,9 @@
                 <a:latin typeface="メイリオ"/>
               </a:rPr>
               <a:t>ケンシロウがラオウと戦う。
-勝利→次セット継続、敗北→BB終了。
-復活演出あり（バトル後も終わらない）。</a:t>
+消化中のレア役→継続への書き換え抽選。
+8G目レア役→ユリア復活確定（継続率84%以上が確定）。
+敗北後も復活演出あり。</a:t>
             </a:r>
           </a:p>
         </p:txBody>
@@ -10056,7 +10058,7 @@
                 </a:solidFill>
                 <a:latin typeface="游明朝"/>
               </a:rPr>
-              <a:t>有利区間問題 ── 不透明な差枚管理への不満</a:t>
+              <a:t>ゲーム体験の核心 ── 緊張・自力感・理不尽が共存する設計</a:t>
             </a:r>
           </a:p>
         </p:txBody>
@@ -10091,7 +10093,7 @@
                 </a:solidFill>
                 <a:latin typeface="メイリオ"/>
               </a:rPr>
-              <a:t>5/7</a:t>
+              <a:t>5/8</a:t>
             </a:r>
           </a:p>
         </p:txBody>
@@ -10147,14 +10149,174 @@
         </p:nvSpPr>
         <p:spPr>
           <a:xfrm>
-            <a:off x="256032" y="658368"/>
-            <a:ext cx="4114800" cy="1360000"/>
+            <a:off x="182880" y="658368"/>
+            <a:ext cx="1463040" cy="1380000"/>
           </a:xfrm>
           <a:prstGeom prst="rect">
             <a:avLst/>
           </a:prstGeom>
           <a:solidFill>
-            <a:srgbClr val="0C1228"/>
+            <a:srgbClr val="141C38"/>
+          </a:solidFill>
+          <a:ln w="19050">
+            <a:solidFill>
+              <a:srgbClr val="C8A840"/>
+            </a:solidFill>
+          </a:ln>
+        </p:spPr>
+        <p:style>
+          <a:lnRef idx="1">
+            <a:schemeClr val="accent1"/>
+          </a:lnRef>
+          <a:fillRef idx="3">
+            <a:schemeClr val="accent1"/>
+          </a:fillRef>
+          <a:effectRef idx="2">
+            <a:schemeClr val="accent1"/>
+          </a:effectRef>
+          <a:fontRef idx="minor">
+            <a:schemeClr val="lt1"/>
+          </a:fontRef>
+        </p:style>
+        <p:txBody>
+          <a:bodyPr rtlCol="0" anchor="ctr"/>
+          <a:lstStyle/>
+          <a:p>
+            <a:pPr algn="ctr"/>
+          </a:p>
+        </p:txBody>
+      </p:sp>
+      <p:sp>
+        <p:nvSpPr>
+          <p:cNvPr id="9" name="TextBox 8"/>
+          <p:cNvSpPr txBox="1"/>
+          <p:nvPr/>
+        </p:nvSpPr>
+        <p:spPr>
+          <a:xfrm>
+            <a:off x="222880" y="718368"/>
+            <a:ext cx="1403040" cy="380000"/>
+          </a:xfrm>
+          <a:prstGeom prst="rect">
+            <a:avLst/>
+          </a:prstGeom>
+          <a:noFill/>
+        </p:spPr>
+        <p:txBody>
+          <a:bodyPr wrap="square">
+            <a:spAutoFit/>
+          </a:bodyPr>
+          <a:lstStyle/>
+          <a:p>
+            <a:pPr algn="ctr"/>
+            <a:r>
+              <a:rPr sz="950" b="1">
+                <a:solidFill>
+                  <a:srgbClr val="C8A840"/>
+                </a:solidFill>
+                <a:latin typeface="游明朝"/>
+              </a:rPr>
+              <a:t>BB開始</a:t>
+            </a:r>
+          </a:p>
+        </p:txBody>
+      </p:sp>
+      <p:sp>
+        <p:nvSpPr>
+          <p:cNvPr id="10" name="TextBox 9"/>
+          <p:cNvSpPr txBox="1"/>
+          <p:nvPr/>
+        </p:nvSpPr>
+        <p:spPr>
+          <a:xfrm>
+            <a:off x="217880" y="1118368"/>
+            <a:ext cx="1408040" cy="820000"/>
+          </a:xfrm>
+          <a:prstGeom prst="rect">
+            <a:avLst/>
+          </a:prstGeom>
+          <a:noFill/>
+        </p:spPr>
+        <p:txBody>
+          <a:bodyPr wrap="square">
+            <a:spAutoFit/>
+          </a:bodyPr>
+          <a:lstStyle/>
+          <a:p>
+            <a:pPr algn="ctr"/>
+            <a:r>
+              <a:rPr sz="800" b="0">
+                <a:solidFill>
+                  <a:srgbClr val="E8E8F4"/>
+                </a:solidFill>
+                <a:latin typeface="メイリオ"/>
+              </a:rPr>
+              <a:t>オーラ色が示される
+継続率が「宣言」
+（白〜虹の6段階）</a:t>
+            </a:r>
+          </a:p>
+        </p:txBody>
+      </p:sp>
+      <p:sp>
+        <p:nvSpPr>
+          <p:cNvPr id="11" name="Can 10"/>
+          <p:cNvSpPr/>
+          <p:nvPr/>
+        </p:nvSpPr>
+        <p:spPr>
+          <a:xfrm>
+            <a:off x="1725920" y="1258368"/>
+            <a:ext cx="200000" cy="180000"/>
+          </a:xfrm>
+          <a:prstGeom prst="can">
+            <a:avLst/>
+          </a:prstGeom>
+          <a:solidFill>
+            <a:srgbClr val="BB1111"/>
+          </a:solidFill>
+          <a:ln>
+            <a:noFill/>
+          </a:ln>
+        </p:spPr>
+        <p:style>
+          <a:lnRef idx="1">
+            <a:schemeClr val="accent1"/>
+          </a:lnRef>
+          <a:fillRef idx="3">
+            <a:schemeClr val="accent1"/>
+          </a:fillRef>
+          <a:effectRef idx="2">
+            <a:schemeClr val="accent1"/>
+          </a:effectRef>
+          <a:fontRef idx="minor">
+            <a:schemeClr val="lt1"/>
+          </a:fontRef>
+        </p:style>
+        <p:txBody>
+          <a:bodyPr rtlCol="0" anchor="ctr"/>
+          <a:lstStyle/>
+          <a:p>
+            <a:pPr algn="ctr"/>
+          </a:p>
+        </p:txBody>
+      </p:sp>
+      <p:sp>
+        <p:nvSpPr>
+          <p:cNvPr id="12" name="Rectangle 11"/>
+          <p:cNvSpPr/>
+          <p:nvPr/>
+        </p:nvSpPr>
+        <p:spPr>
+          <a:xfrm>
+            <a:off x="1975104" y="658368"/>
+            <a:ext cx="1463040" cy="1380000"/>
+          </a:xfrm>
+          <a:prstGeom prst="rect">
+            <a:avLst/>
+          </a:prstGeom>
+          <a:solidFill>
+            <a:srgbClr val="140404"/>
           </a:solidFill>
           <a:ln w="19050">
             <a:solidFill>
@@ -10186,16 +10348,89 @@
       </p:sp>
       <p:sp>
         <p:nvSpPr>
-          <p:cNvPr id="9" name="Rectangle 8"/>
+          <p:cNvPr id="13" name="TextBox 12"/>
+          <p:cNvSpPr txBox="1"/>
+          <p:nvPr/>
+        </p:nvSpPr>
+        <p:spPr>
+          <a:xfrm>
+            <a:off x="2015104" y="718368"/>
+            <a:ext cx="1403040" cy="380000"/>
+          </a:xfrm>
+          <a:prstGeom prst="rect">
+            <a:avLst/>
+          </a:prstGeom>
+          <a:noFill/>
+        </p:spPr>
+        <p:txBody>
+          <a:bodyPr wrap="square">
+            <a:spAutoFit/>
+          </a:bodyPr>
+          <a:lstStyle/>
+          <a:p>
+            <a:pPr algn="ctr"/>
+            <a:r>
+              <a:rPr sz="950" b="1">
+                <a:solidFill>
+                  <a:srgbClr val="BB1111"/>
+                </a:solidFill>
+                <a:latin typeface="游明朝"/>
+              </a:rPr>
+              <a:t>小役パート
+（宿命バトル）</a:t>
+            </a:r>
+          </a:p>
+        </p:txBody>
+      </p:sp>
+      <p:sp>
+        <p:nvSpPr>
+          <p:cNvPr id="14" name="TextBox 13"/>
+          <p:cNvSpPr txBox="1"/>
+          <p:nvPr/>
+        </p:nvSpPr>
+        <p:spPr>
+          <a:xfrm>
+            <a:off x="2010104" y="1118368"/>
+            <a:ext cx="1408040" cy="820000"/>
+          </a:xfrm>
+          <a:prstGeom prst="rect">
+            <a:avLst/>
+          </a:prstGeom>
+          <a:noFill/>
+        </p:spPr>
+        <p:txBody>
+          <a:bodyPr wrap="square">
+            <a:spAutoFit/>
+          </a:bodyPr>
+          <a:lstStyle/>
+          <a:p>
+            <a:pPr algn="ctr"/>
+            <a:r>
+              <a:rPr sz="800" b="0">
+                <a:solidFill>
+                  <a:srgbClr val="E8E8F4"/>
+                </a:solidFill>
+                <a:latin typeface="メイリオ"/>
+              </a:rPr>
+              <a:t>レア役を引いて勝利
+→ Vストック獲得
+「自力感の核心」</a:t>
+            </a:r>
+          </a:p>
+        </p:txBody>
+      </p:sp>
+      <p:sp>
+        <p:nvSpPr>
+          <p:cNvPr id="15" name="Can 14"/>
           <p:cNvSpPr/>
           <p:nvPr/>
         </p:nvSpPr>
         <p:spPr>
           <a:xfrm>
-            <a:off x="256032" y="658368"/>
-            <a:ext cx="45000" cy="1360000"/>
-          </a:xfrm>
-          <a:prstGeom prst="rect">
+            <a:off x="3518144" y="1258368"/>
+            <a:ext cx="200000" cy="180000"/>
+          </a:xfrm>
+          <a:prstGeom prst="can">
             <a:avLst/>
           </a:prstGeom>
           <a:solidFill>
@@ -10229,96 +10464,24 @@
       </p:sp>
       <p:sp>
         <p:nvSpPr>
-          <p:cNvPr id="10" name="TextBox 9"/>
-          <p:cNvSpPr txBox="1"/>
-          <p:nvPr/>
-        </p:nvSpPr>
-        <p:spPr>
-          <a:xfrm>
-            <a:off x="336032" y="708368"/>
-            <a:ext cx="4014800" cy="260000"/>
-          </a:xfrm>
-          <a:prstGeom prst="rect">
-            <a:avLst/>
-          </a:prstGeom>
-          <a:noFill/>
-        </p:spPr>
-        <p:txBody>
-          <a:bodyPr wrap="square">
-            <a:spAutoFit/>
-          </a:bodyPr>
-          <a:lstStyle/>
-          <a:p>
-            <a:pPr algn="l"/>
-            <a:r>
-              <a:rPr sz="900" b="1">
-                <a:solidFill>
-                  <a:srgbClr val="BB1111"/>
-                </a:solidFill>
-                <a:latin typeface="メイリオ"/>
-              </a:rPr>
-              <a:t>差枚管理の不透明さ</a:t>
-            </a:r>
-          </a:p>
-        </p:txBody>
-      </p:sp>
-      <p:sp>
-        <p:nvSpPr>
-          <p:cNvPr id="11" name="TextBox 10"/>
-          <p:cNvSpPr txBox="1"/>
-          <p:nvPr/>
-        </p:nvSpPr>
-        <p:spPr>
-          <a:xfrm>
-            <a:off x="336032" y="963368"/>
-            <a:ext cx="4014800" cy="950000"/>
-          </a:xfrm>
-          <a:prstGeom prst="rect">
-            <a:avLst/>
-          </a:prstGeom>
-          <a:noFill/>
-        </p:spPr>
-        <p:txBody>
-          <a:bodyPr wrap="square">
-            <a:spAutoFit/>
-          </a:bodyPr>
-          <a:lstStyle/>
-          <a:p>
-            <a:pPr algn="l"/>
-            <a:r>
-              <a:rPr sz="800" b="0">
-                <a:solidFill>
-                  <a:srgbClr val="E8E8F4"/>
-                </a:solidFill>
-                <a:latin typeface="メイリオ"/>
-              </a:rPr>
-              <a:t>有利区間内で差枚が上限付近（2,000枚前後）になると
-当選が重くなる「冷遇区間」の存在が語られる。
-公式は確率を一切公開していない。</a:t>
-            </a:r>
-          </a:p>
-        </p:txBody>
-      </p:sp>
-      <p:sp>
-        <p:nvSpPr>
-          <p:cNvPr id="12" name="Rectangle 11"/>
+          <p:cNvPr id="16" name="Rectangle 15"/>
           <p:cNvSpPr/>
           <p:nvPr/>
         </p:nvSpPr>
         <p:spPr>
           <a:xfrm>
-            <a:off x="256032" y="2088368"/>
-            <a:ext cx="4114800" cy="1360000"/>
+            <a:off x="3767328" y="658368"/>
+            <a:ext cx="1463040" cy="1380000"/>
           </a:xfrm>
           <a:prstGeom prst="rect">
             <a:avLst/>
           </a:prstGeom>
           <a:solidFill>
-            <a:srgbClr val="0C1228"/>
+            <a:srgbClr val="060C20"/>
           </a:solidFill>
           <a:ln w="19050">
             <a:solidFill>
-              <a:srgbClr val="444466"/>
+              <a:srgbClr val="22AA99"/>
             </a:solidFill>
           </a:ln>
         </p:spPr>
@@ -10346,716 +10509,88 @@
       </p:sp>
       <p:sp>
         <p:nvSpPr>
-          <p:cNvPr id="13" name="Rectangle 12"/>
+          <p:cNvPr id="17" name="TextBox 16"/>
+          <p:cNvSpPr txBox="1"/>
+          <p:nvPr/>
+        </p:nvSpPr>
+        <p:spPr>
+          <a:xfrm>
+            <a:off x="3807328" y="718368"/>
+            <a:ext cx="1403040" cy="380000"/>
+          </a:xfrm>
+          <a:prstGeom prst="rect">
+            <a:avLst/>
+          </a:prstGeom>
+          <a:noFill/>
+        </p:spPr>
+        <p:txBody>
+          <a:bodyPr wrap="square">
+            <a:spAutoFit/>
+          </a:bodyPr>
+          <a:lstStyle/>
+          <a:p>
+            <a:pPr algn="ctr"/>
+            <a:r>
+              <a:rPr sz="950" b="1">
+                <a:solidFill>
+                  <a:srgbClr val="22AA99"/>
+                </a:solidFill>
+                <a:latin typeface="游明朝"/>
+              </a:rPr>
+              <a:t>バトルパート</a:t>
+            </a:r>
+          </a:p>
+        </p:txBody>
+      </p:sp>
+      <p:sp>
+        <p:nvSpPr>
+          <p:cNvPr id="18" name="TextBox 17"/>
+          <p:cNvSpPr txBox="1"/>
+          <p:nvPr/>
+        </p:nvSpPr>
+        <p:spPr>
+          <a:xfrm>
+            <a:off x="3802328" y="1118368"/>
+            <a:ext cx="1408040" cy="820000"/>
+          </a:xfrm>
+          <a:prstGeom prst="rect">
+            <a:avLst/>
+          </a:prstGeom>
+          <a:noFill/>
+        </p:spPr>
+        <p:txBody>
+          <a:bodyPr wrap="square">
+            <a:spAutoFit/>
+          </a:bodyPr>
+          <a:lstStyle/>
+          <a:p>
+            <a:pPr algn="ctr"/>
+            <a:r>
+              <a:rPr sz="800" b="0">
+                <a:solidFill>
+                  <a:srgbClr val="E8E8F4"/>
+                </a:solidFill>
+                <a:latin typeface="メイリオ"/>
+              </a:rPr>
+              <a:t>ケンシロウが
+ラオウと戦う
+勝敗は次の瞬間に</a:t>
+            </a:r>
+          </a:p>
+        </p:txBody>
+      </p:sp>
+      <p:sp>
+        <p:nvSpPr>
+          <p:cNvPr id="19" name="Can 18"/>
           <p:cNvSpPr/>
           <p:nvPr/>
         </p:nvSpPr>
         <p:spPr>
           <a:xfrm>
-            <a:off x="256032" y="2088368"/>
-            <a:ext cx="45000" cy="1360000"/>
-          </a:xfrm>
-          <a:prstGeom prst="rect">
-            <a:avLst/>
-          </a:prstGeom>
-          <a:solidFill>
-            <a:srgbClr val="444466"/>
-          </a:solidFill>
-          <a:ln>
-            <a:noFill/>
-          </a:ln>
-        </p:spPr>
-        <p:style>
-          <a:lnRef idx="1">
-            <a:schemeClr val="accent1"/>
-          </a:lnRef>
-          <a:fillRef idx="3">
-            <a:schemeClr val="accent1"/>
-          </a:fillRef>
-          <a:effectRef idx="2">
-            <a:schemeClr val="accent1"/>
-          </a:effectRef>
-          <a:fontRef idx="minor">
-            <a:schemeClr val="lt1"/>
-          </a:fontRef>
-        </p:style>
-        <p:txBody>
-          <a:bodyPr rtlCol="0" anchor="ctr"/>
-          <a:lstStyle/>
-          <a:p>
-            <a:pPr algn="ctr"/>
-          </a:p>
-        </p:txBody>
-      </p:sp>
-      <p:sp>
-        <p:nvSpPr>
-          <p:cNvPr id="14" name="TextBox 13"/>
-          <p:cNvSpPr txBox="1"/>
-          <p:nvPr/>
-        </p:nvSpPr>
-        <p:spPr>
-          <a:xfrm>
-            <a:off x="336032" y="2138368"/>
-            <a:ext cx="4014800" cy="260000"/>
-          </a:xfrm>
-          <a:prstGeom prst="rect">
-            <a:avLst/>
-          </a:prstGeom>
-          <a:noFill/>
-        </p:spPr>
-        <p:txBody>
-          <a:bodyPr wrap="square">
-            <a:spAutoFit/>
-          </a:bodyPr>
-          <a:lstStyle/>
-          <a:p>
-            <a:pPr algn="l"/>
-            <a:r>
-              <a:rPr sz="900" b="1">
-                <a:solidFill>
-                  <a:srgbClr val="444466"/>
-                </a:solidFill>
-                <a:latin typeface="メイリオ"/>
-              </a:rPr>
-              <a:t>天然終了か冷遇終了か判断できない</a:t>
-            </a:r>
-          </a:p>
-        </p:txBody>
-      </p:sp>
-      <p:sp>
-        <p:nvSpPr>
-          <p:cNvPr id="15" name="TextBox 14"/>
-          <p:cNvSpPr txBox="1"/>
-          <p:nvPr/>
-        </p:nvSpPr>
-        <p:spPr>
-          <a:xfrm>
-            <a:off x="336032" y="2393368"/>
-            <a:ext cx="4014800" cy="950000"/>
-          </a:xfrm>
-          <a:prstGeom prst="rect">
-            <a:avLst/>
-          </a:prstGeom>
-          <a:noFill/>
-        </p:spPr>
-        <p:txBody>
-          <a:bodyPr wrap="square">
-            <a:spAutoFit/>
-          </a:bodyPr>
-          <a:lstStyle/>
-          <a:p>
-            <a:pPr algn="l"/>
-            <a:r>
-              <a:rPr sz="800" b="0">
-                <a:solidFill>
-                  <a:srgbClr val="E8E8F4"/>
-                </a:solidFill>
-                <a:latin typeface="メイリオ"/>
-              </a:rPr>
-              <a:t>有利区間終了の原因が差枚管理なのか
-単純な不運なのか、ユーザーには区別できない。
-この不透明さがデキレ・冷遇論争を継続させる。</a:t>
-            </a:r>
-          </a:p>
-        </p:txBody>
-      </p:sp>
-      <p:sp>
-        <p:nvSpPr>
-          <p:cNvPr id="16" name="Rectangle 15"/>
-          <p:cNvSpPr/>
-          <p:nvPr/>
-        </p:nvSpPr>
-        <p:spPr>
-          <a:xfrm>
-            <a:off x="256032" y="3518368"/>
-            <a:ext cx="4114800" cy="1360000"/>
-          </a:xfrm>
-          <a:prstGeom prst="rect">
-            <a:avLst/>
-          </a:prstGeom>
-          <a:solidFill>
-            <a:srgbClr val="0C1228"/>
-          </a:solidFill>
-          <a:ln w="19050">
-            <a:solidFill>
-              <a:srgbClr val="444466"/>
-            </a:solidFill>
-          </a:ln>
-        </p:spPr>
-        <p:style>
-          <a:lnRef idx="1">
-            <a:schemeClr val="accent1"/>
-          </a:lnRef>
-          <a:fillRef idx="3">
-            <a:schemeClr val="accent1"/>
-          </a:fillRef>
-          <a:effectRef idx="2">
-            <a:schemeClr val="accent1"/>
-          </a:effectRef>
-          <a:fontRef idx="minor">
-            <a:schemeClr val="lt1"/>
-          </a:fontRef>
-        </p:style>
-        <p:txBody>
-          <a:bodyPr rtlCol="0" anchor="ctr"/>
-          <a:lstStyle/>
-          <a:p>
-            <a:pPr algn="ctr"/>
-          </a:p>
-        </p:txBody>
-      </p:sp>
-      <p:sp>
-        <p:nvSpPr>
-          <p:cNvPr id="17" name="Rectangle 16"/>
-          <p:cNvSpPr/>
-          <p:nvPr/>
-        </p:nvSpPr>
-        <p:spPr>
-          <a:xfrm>
-            <a:off x="256032" y="3518368"/>
-            <a:ext cx="45000" cy="1360000"/>
-          </a:xfrm>
-          <a:prstGeom prst="rect">
-            <a:avLst/>
-          </a:prstGeom>
-          <a:solidFill>
-            <a:srgbClr val="444466"/>
-          </a:solidFill>
-          <a:ln>
-            <a:noFill/>
-          </a:ln>
-        </p:spPr>
-        <p:style>
-          <a:lnRef idx="1">
-            <a:schemeClr val="accent1"/>
-          </a:lnRef>
-          <a:fillRef idx="3">
-            <a:schemeClr val="accent1"/>
-          </a:fillRef>
-          <a:effectRef idx="2">
-            <a:schemeClr val="accent1"/>
-          </a:effectRef>
-          <a:fontRef idx="minor">
-            <a:schemeClr val="lt1"/>
-          </a:fontRef>
-        </p:style>
-        <p:txBody>
-          <a:bodyPr rtlCol="0" anchor="ctr"/>
-          <a:lstStyle/>
-          <a:p>
-            <a:pPr algn="ctr"/>
-          </a:p>
-        </p:txBody>
-      </p:sp>
-      <p:sp>
-        <p:nvSpPr>
-          <p:cNvPr id="18" name="TextBox 17"/>
-          <p:cNvSpPr txBox="1"/>
-          <p:nvPr/>
-        </p:nvSpPr>
-        <p:spPr>
-          <a:xfrm>
-            <a:off x="336032" y="3568368"/>
-            <a:ext cx="4014800" cy="260000"/>
-          </a:xfrm>
-          <a:prstGeom prst="rect">
-            <a:avLst/>
-          </a:prstGeom>
-          <a:noFill/>
-        </p:spPr>
-        <p:txBody>
-          <a:bodyPr wrap="square">
-            <a:spAutoFit/>
-          </a:bodyPr>
-          <a:lstStyle/>
-          <a:p>
-            <a:pPr algn="l"/>
-            <a:r>
-              <a:rPr sz="900" b="1">
-                <a:solidFill>
-                  <a:srgbClr val="444466"/>
-                </a:solidFill>
-                <a:latin typeface="メイリオ"/>
-              </a:rPr>
-              <a:t>無想転生後の「壁」体験</a:t>
-            </a:r>
-          </a:p>
-        </p:txBody>
-      </p:sp>
-      <p:sp>
-        <p:nvSpPr>
-          <p:cNvPr id="19" name="TextBox 18"/>
-          <p:cNvSpPr txBox="1"/>
-          <p:nvPr/>
-        </p:nvSpPr>
-        <p:spPr>
-          <a:xfrm>
-            <a:off x="336032" y="3823368"/>
-            <a:ext cx="4014800" cy="950000"/>
-          </a:xfrm>
-          <a:prstGeom prst="rect">
-            <a:avLst/>
-          </a:prstGeom>
-          <a:noFill/>
-        </p:spPr>
-        <p:txBody>
-          <a:bodyPr wrap="square">
-            <a:spAutoFit/>
-          </a:bodyPr>
-          <a:lstStyle/>
-          <a:p>
-            <a:pPr algn="l"/>
-            <a:r>
-              <a:rPr sz="800" b="0">
-                <a:solidFill>
-                  <a:srgbClr val="E8E8F4"/>
-                </a:solidFill>
-                <a:latin typeface="メイリオ"/>
-              </a:rPr>
-              <a:t>大量獲得後に急に当たらなくなる体験が
-「冷遇だ」と解釈される。実際の確率変動か
-運なのかは不明のまま。</a:t>
-            </a:r>
-          </a:p>
-        </p:txBody>
-      </p:sp>
-      <p:sp>
-        <p:nvSpPr>
-          <p:cNvPr id="20" name="Rectangle 19"/>
-          <p:cNvSpPr/>
-          <p:nvPr/>
-        </p:nvSpPr>
-        <p:spPr>
-          <a:xfrm>
-            <a:off x="4572000" y="658368"/>
-            <a:ext cx="4297680" cy="530000"/>
-          </a:xfrm>
-          <a:prstGeom prst="rect">
-            <a:avLst/>
-          </a:prstGeom>
-          <a:solidFill>
-            <a:srgbClr val="880000"/>
-          </a:solidFill>
-          <a:ln>
-            <a:noFill/>
-          </a:ln>
-        </p:spPr>
-        <p:style>
-          <a:lnRef idx="1">
-            <a:schemeClr val="accent1"/>
-          </a:lnRef>
-          <a:fillRef idx="3">
-            <a:schemeClr val="accent1"/>
-          </a:fillRef>
-          <a:effectRef idx="2">
-            <a:schemeClr val="accent1"/>
-          </a:effectRef>
-          <a:fontRef idx="minor">
-            <a:schemeClr val="lt1"/>
-          </a:fontRef>
-        </p:style>
-        <p:txBody>
-          <a:bodyPr rtlCol="0" anchor="ctr"/>
-          <a:lstStyle/>
-          <a:p>
-            <a:pPr algn="ctr"/>
-          </a:p>
-        </p:txBody>
-      </p:sp>
-      <p:sp>
-        <p:nvSpPr>
-          <p:cNvPr id="21" name="TextBox 20"/>
-          <p:cNvSpPr txBox="1"/>
-          <p:nvPr/>
-        </p:nvSpPr>
-        <p:spPr>
-          <a:xfrm>
-            <a:off x="4632000" y="713368"/>
-            <a:ext cx="4217680" cy="240000"/>
-          </a:xfrm>
-          <a:prstGeom prst="rect">
-            <a:avLst/>
-          </a:prstGeom>
-          <a:noFill/>
-        </p:spPr>
-        <p:txBody>
-          <a:bodyPr wrap="square">
-            <a:spAutoFit/>
-          </a:bodyPr>
-          <a:lstStyle/>
-          <a:p>
-            <a:pPr algn="l"/>
-            <a:r>
-              <a:rPr sz="1100" b="1">
-                <a:solidFill>
-                  <a:srgbClr val="C8A840"/>
-                </a:solidFill>
-                <a:latin typeface="游明朝"/>
-              </a:rPr>
-              <a:t>なぜ議論が続くのか？</a:t>
-            </a:r>
-          </a:p>
-        </p:txBody>
-      </p:sp>
-      <p:sp>
-        <p:nvSpPr>
-          <p:cNvPr id="22" name="TextBox 21"/>
-          <p:cNvSpPr txBox="1"/>
-          <p:nvPr/>
-        </p:nvSpPr>
-        <p:spPr>
-          <a:xfrm>
-            <a:off x="4632000" y="948368"/>
-            <a:ext cx="4217680" cy="210000"/>
-          </a:xfrm>
-          <a:prstGeom prst="rect">
-            <a:avLst/>
-          </a:prstGeom>
-          <a:noFill/>
-        </p:spPr>
-        <p:txBody>
-          <a:bodyPr wrap="square">
-            <a:spAutoFit/>
-          </a:bodyPr>
-          <a:lstStyle/>
-          <a:p>
-            <a:pPr algn="l"/>
-            <a:r>
-              <a:rPr sz="850" b="0">
-                <a:solidFill>
-                  <a:srgbClr val="D0C0A0"/>
-                </a:solidFill>
-                <a:latin typeface="メイリオ"/>
-              </a:rPr>
-              <a:t>有利区間の「見えない壁」が信頼を侵食する</a:t>
-            </a:r>
-          </a:p>
-        </p:txBody>
-      </p:sp>
-      <p:sp>
-        <p:nvSpPr>
-          <p:cNvPr id="23" name="Rectangle 22"/>
-          <p:cNvSpPr/>
-          <p:nvPr/>
-        </p:nvSpPr>
-        <p:spPr>
-          <a:xfrm>
-            <a:off x="4572000" y="1188368"/>
-            <a:ext cx="18000" cy="490000"/>
-          </a:xfrm>
-          <a:prstGeom prst="rect">
-            <a:avLst/>
-          </a:prstGeom>
-          <a:solidFill>
-            <a:srgbClr val="444466"/>
-          </a:solidFill>
-          <a:ln>
-            <a:noFill/>
-          </a:ln>
-        </p:spPr>
-        <p:style>
-          <a:lnRef idx="1">
-            <a:schemeClr val="accent1"/>
-          </a:lnRef>
-          <a:fillRef idx="3">
-            <a:schemeClr val="accent1"/>
-          </a:fillRef>
-          <a:effectRef idx="2">
-            <a:schemeClr val="accent1"/>
-          </a:effectRef>
-          <a:fontRef idx="minor">
-            <a:schemeClr val="lt1"/>
-          </a:fontRef>
-        </p:style>
-        <p:txBody>
-          <a:bodyPr rtlCol="0" anchor="ctr"/>
-          <a:lstStyle/>
-          <a:p>
-            <a:pPr algn="ctr"/>
-          </a:p>
-        </p:txBody>
-      </p:sp>
-      <p:sp>
-        <p:nvSpPr>
-          <p:cNvPr id="24" name="TextBox 23"/>
-          <p:cNvSpPr txBox="1"/>
-          <p:nvPr/>
-        </p:nvSpPr>
-        <p:spPr>
-          <a:xfrm>
-            <a:off x="4622000" y="1268368"/>
-            <a:ext cx="4237680" cy="380000"/>
-          </a:xfrm>
-          <a:prstGeom prst="rect">
-            <a:avLst/>
-          </a:prstGeom>
-          <a:noFill/>
-        </p:spPr>
-        <p:txBody>
-          <a:bodyPr wrap="square">
-            <a:spAutoFit/>
-          </a:bodyPr>
-          <a:lstStyle/>
-          <a:p>
-            <a:pPr algn="l"/>
-            <a:r>
-              <a:rPr sz="850" b="0">
-                <a:solidFill>
-                  <a:srgbClr val="E8E8F4"/>
-                </a:solidFill>
-                <a:latin typeface="メイリオ"/>
-              </a:rPr>
-              <a:t>スロット台への期待感は「公平性への信頼」が前提</a:t>
-            </a:r>
-          </a:p>
-        </p:txBody>
-      </p:sp>
-      <p:sp>
-        <p:nvSpPr>
-          <p:cNvPr id="25" name="Rectangle 24"/>
-          <p:cNvSpPr/>
-          <p:nvPr/>
-        </p:nvSpPr>
-        <p:spPr>
-          <a:xfrm>
-            <a:off x="4572000" y="1728368"/>
-            <a:ext cx="18000" cy="490000"/>
-          </a:xfrm>
-          <a:prstGeom prst="rect">
-            <a:avLst/>
-          </a:prstGeom>
-          <a:solidFill>
-            <a:srgbClr val="444466"/>
-          </a:solidFill>
-          <a:ln>
-            <a:noFill/>
-          </a:ln>
-        </p:spPr>
-        <p:style>
-          <a:lnRef idx="1">
-            <a:schemeClr val="accent1"/>
-          </a:lnRef>
-          <a:fillRef idx="3">
-            <a:schemeClr val="accent1"/>
-          </a:fillRef>
-          <a:effectRef idx="2">
-            <a:schemeClr val="accent1"/>
-          </a:effectRef>
-          <a:fontRef idx="minor">
-            <a:schemeClr val="lt1"/>
-          </a:fontRef>
-        </p:style>
-        <p:txBody>
-          <a:bodyPr rtlCol="0" anchor="ctr"/>
-          <a:lstStyle/>
-          <a:p>
-            <a:pPr algn="ctr"/>
-          </a:p>
-        </p:txBody>
-      </p:sp>
-      <p:sp>
-        <p:nvSpPr>
-          <p:cNvPr id="26" name="TextBox 25"/>
-          <p:cNvSpPr txBox="1"/>
-          <p:nvPr/>
-        </p:nvSpPr>
-        <p:spPr>
-          <a:xfrm>
-            <a:off x="4622000" y="1808368"/>
-            <a:ext cx="4237680" cy="380000"/>
-          </a:xfrm>
-          <a:prstGeom prst="rect">
-            <a:avLst/>
-          </a:prstGeom>
-          <a:noFill/>
-        </p:spPr>
-        <p:txBody>
-          <a:bodyPr wrap="square">
-            <a:spAutoFit/>
-          </a:bodyPr>
-          <a:lstStyle/>
-          <a:p>
-            <a:pPr algn="l"/>
-            <a:r>
-              <a:rPr sz="850" b="0">
-                <a:solidFill>
-                  <a:srgbClr val="E8E8F4"/>
-                </a:solidFill>
-                <a:latin typeface="メイリオ"/>
-              </a:rPr>
-              <a:t>確率非公開 + 差枚管理 = 陰謀論が育つ環境</a:t>
-            </a:r>
-          </a:p>
-        </p:txBody>
-      </p:sp>
-      <p:sp>
-        <p:nvSpPr>
-          <p:cNvPr id="27" name="Rectangle 26"/>
-          <p:cNvSpPr/>
-          <p:nvPr/>
-        </p:nvSpPr>
-        <p:spPr>
-          <a:xfrm>
-            <a:off x="4572000" y="2268368"/>
-            <a:ext cx="18000" cy="490000"/>
-          </a:xfrm>
-          <a:prstGeom prst="rect">
-            <a:avLst/>
-          </a:prstGeom>
-          <a:solidFill>
-            <a:srgbClr val="444466"/>
-          </a:solidFill>
-          <a:ln>
-            <a:noFill/>
-          </a:ln>
-        </p:spPr>
-        <p:style>
-          <a:lnRef idx="1">
-            <a:schemeClr val="accent1"/>
-          </a:lnRef>
-          <a:fillRef idx="3">
-            <a:schemeClr val="accent1"/>
-          </a:fillRef>
-          <a:effectRef idx="2">
-            <a:schemeClr val="accent1"/>
-          </a:effectRef>
-          <a:fontRef idx="minor">
-            <a:schemeClr val="lt1"/>
-          </a:fontRef>
-        </p:style>
-        <p:txBody>
-          <a:bodyPr rtlCol="0" anchor="ctr"/>
-          <a:lstStyle/>
-          <a:p>
-            <a:pPr algn="ctr"/>
-          </a:p>
-        </p:txBody>
-      </p:sp>
-      <p:sp>
-        <p:nvSpPr>
-          <p:cNvPr id="28" name="TextBox 27"/>
-          <p:cNvSpPr txBox="1"/>
-          <p:nvPr/>
-        </p:nvSpPr>
-        <p:spPr>
-          <a:xfrm>
-            <a:off x="4622000" y="2348368"/>
-            <a:ext cx="4237680" cy="380000"/>
-          </a:xfrm>
-          <a:prstGeom prst="rect">
-            <a:avLst/>
-          </a:prstGeom>
-          <a:noFill/>
-        </p:spPr>
-        <p:txBody>
-          <a:bodyPr wrap="square">
-            <a:spAutoFit/>
-          </a:bodyPr>
-          <a:lstStyle/>
-          <a:p>
-            <a:pPr algn="l"/>
-            <a:r>
-              <a:rPr sz="850" b="0">
-                <a:solidFill>
-                  <a:srgbClr val="E8E8F4"/>
-                </a:solidFill>
-                <a:latin typeface="メイリオ"/>
-              </a:rPr>
-              <a:t>設定6でも負ける体験が「デキレ」解釈を生む</a:t>
-            </a:r>
-          </a:p>
-        </p:txBody>
-      </p:sp>
-      <p:sp>
-        <p:nvSpPr>
-          <p:cNvPr id="29" name="Rectangle 28"/>
-          <p:cNvSpPr/>
-          <p:nvPr/>
-        </p:nvSpPr>
-        <p:spPr>
-          <a:xfrm>
-            <a:off x="4572000" y="2808368"/>
-            <a:ext cx="18000" cy="490000"/>
-          </a:xfrm>
-          <a:prstGeom prst="rect">
-            <a:avLst/>
-          </a:prstGeom>
-          <a:solidFill>
-            <a:srgbClr val="444466"/>
-          </a:solidFill>
-          <a:ln>
-            <a:noFill/>
-          </a:ln>
-        </p:spPr>
-        <p:style>
-          <a:lnRef idx="1">
-            <a:schemeClr val="accent1"/>
-          </a:lnRef>
-          <a:fillRef idx="3">
-            <a:schemeClr val="accent1"/>
-          </a:fillRef>
-          <a:effectRef idx="2">
-            <a:schemeClr val="accent1"/>
-          </a:effectRef>
-          <a:fontRef idx="minor">
-            <a:schemeClr val="lt1"/>
-          </a:fontRef>
-        </p:style>
-        <p:txBody>
-          <a:bodyPr rtlCol="0" anchor="ctr"/>
-          <a:lstStyle/>
-          <a:p>
-            <a:pPr algn="ctr"/>
-          </a:p>
-        </p:txBody>
-      </p:sp>
-      <p:sp>
-        <p:nvSpPr>
-          <p:cNvPr id="30" name="TextBox 29"/>
-          <p:cNvSpPr txBox="1"/>
-          <p:nvPr/>
-        </p:nvSpPr>
-        <p:spPr>
-          <a:xfrm>
-            <a:off x="4622000" y="2888368"/>
-            <a:ext cx="4237680" cy="380000"/>
-          </a:xfrm>
-          <a:prstGeom prst="rect">
-            <a:avLst/>
-          </a:prstGeom>
-          <a:noFill/>
-        </p:spPr>
-        <p:txBody>
-          <a:bodyPr wrap="square">
-            <a:spAutoFit/>
-          </a:bodyPr>
-          <a:lstStyle/>
-          <a:p>
-            <a:pPr algn="l"/>
-            <a:r>
-              <a:rPr sz="850" b="0">
-                <a:solidFill>
-                  <a:srgbClr val="E8E8F4"/>
-                </a:solidFill>
-                <a:latin typeface="メイリオ"/>
-              </a:rPr>
-              <a:t>長期稼働にはなっているが、コアユーザーの不信感は残る</a:t>
-            </a:r>
-          </a:p>
-        </p:txBody>
-      </p:sp>
-      <p:sp>
-        <p:nvSpPr>
-          <p:cNvPr id="31" name="Rectangle 30"/>
-          <p:cNvSpPr/>
-          <p:nvPr/>
-        </p:nvSpPr>
-        <p:spPr>
-          <a:xfrm>
-            <a:off x="4572000" y="3348368"/>
-            <a:ext cx="18000" cy="490000"/>
-          </a:xfrm>
-          <a:prstGeom prst="rect">
+            <a:off x="5310368" y="1258368"/>
+            <a:ext cx="200000" cy="180000"/>
+          </a:xfrm>
+          <a:prstGeom prst="can">
             <a:avLst/>
           </a:prstGeom>
           <a:solidFill>
@@ -11089,14 +10624,59 @@
       </p:sp>
       <p:sp>
         <p:nvSpPr>
-          <p:cNvPr id="32" name="TextBox 31"/>
-          <p:cNvSpPr txBox="1"/>
-          <p:nvPr/>
-        </p:nvSpPr>
-        <p:spPr>
-          <a:xfrm>
-            <a:off x="4622000" y="3428368"/>
-            <a:ext cx="4237680" cy="380000"/>
+          <p:cNvPr id="20" name="Rectangle 19"/>
+          <p:cNvSpPr/>
+          <p:nvPr/>
+        </p:nvSpPr>
+        <p:spPr>
+          <a:xfrm>
+            <a:off x="5559552" y="658368"/>
+            <a:ext cx="1463040" cy="1380000"/>
+          </a:xfrm>
+          <a:prstGeom prst="rect">
+            <a:avLst/>
+          </a:prstGeom>
+          <a:solidFill>
+            <a:srgbClr val="1A0404"/>
+          </a:solidFill>
+          <a:ln w="19050">
+            <a:solidFill>
+              <a:srgbClr val="FF3333"/>
+            </a:solidFill>
+          </a:ln>
+        </p:spPr>
+        <p:style>
+          <a:lnRef idx="1">
+            <a:schemeClr val="accent1"/>
+          </a:lnRef>
+          <a:fillRef idx="3">
+            <a:schemeClr val="accent1"/>
+          </a:fillRef>
+          <a:effectRef idx="2">
+            <a:schemeClr val="accent1"/>
+          </a:effectRef>
+          <a:fontRef idx="minor">
+            <a:schemeClr val="lt1"/>
+          </a:fontRef>
+        </p:style>
+        <p:txBody>
+          <a:bodyPr rtlCol="0" anchor="ctr"/>
+          <a:lstStyle/>
+          <a:p>
+            <a:pPr algn="ctr"/>
+          </a:p>
+        </p:txBody>
+      </p:sp>
+      <p:sp>
+        <p:nvSpPr>
+          <p:cNvPr id="21" name="TextBox 20"/>
+          <p:cNvSpPr txBox="1"/>
+          <p:nvPr/>
+        </p:nvSpPr>
+        <p:spPr>
+          <a:xfrm>
+            <a:off x="5599552" y="718368"/>
+            <a:ext cx="1403040" cy="380000"/>
           </a:xfrm>
           <a:prstGeom prst="rect">
             <a:avLst/>
@@ -11109,22 +10689,555 @@
           </a:bodyPr>
           <a:lstStyle/>
           <a:p>
+            <a:pPr algn="ctr"/>
+            <a:r>
+              <a:rPr sz="950" b="1">
+                <a:solidFill>
+                  <a:srgbClr val="FF3333"/>
+                </a:solidFill>
+                <a:latin typeface="游明朝"/>
+              </a:rPr>
+              <a:t>第3停止を
+離す瞬間</a:t>
+            </a:r>
+          </a:p>
+        </p:txBody>
+      </p:sp>
+      <p:sp>
+        <p:nvSpPr>
+          <p:cNvPr id="22" name="TextBox 21"/>
+          <p:cNvSpPr txBox="1"/>
+          <p:nvPr/>
+        </p:nvSpPr>
+        <p:spPr>
+          <a:xfrm>
+            <a:off x="5594552" y="1118368"/>
+            <a:ext cx="1408040" cy="820000"/>
+          </a:xfrm>
+          <a:prstGeom prst="rect">
+            <a:avLst/>
+          </a:prstGeom>
+          <a:noFill/>
+        </p:spPr>
+        <p:txBody>
+          <a:bodyPr wrap="square">
+            <a:spAutoFit/>
+          </a:bodyPr>
+          <a:lstStyle/>
+          <a:p>
+            <a:pPr algn="ctr"/>
+            <a:r>
+              <a:rPr sz="800" b="0">
+                <a:solidFill>
+                  <a:srgbClr val="E8E8F4"/>
+                </a:solidFill>
+                <a:latin typeface="メイリオ"/>
+              </a:rPr>
+              <a:t>この瞬間に勝敗確定
+「緊張の極点」
+復活演出の可能性も</a:t>
+            </a:r>
+          </a:p>
+        </p:txBody>
+      </p:sp>
+      <p:sp>
+        <p:nvSpPr>
+          <p:cNvPr id="23" name="Can 22"/>
+          <p:cNvSpPr/>
+          <p:nvPr/>
+        </p:nvSpPr>
+        <p:spPr>
+          <a:xfrm>
+            <a:off x="7102592" y="1258368"/>
+            <a:ext cx="200000" cy="180000"/>
+          </a:xfrm>
+          <a:prstGeom prst="can">
+            <a:avLst/>
+          </a:prstGeom>
+          <a:solidFill>
+            <a:srgbClr val="BB1111"/>
+          </a:solidFill>
+          <a:ln>
+            <a:noFill/>
+          </a:ln>
+        </p:spPr>
+        <p:style>
+          <a:lnRef idx="1">
+            <a:schemeClr val="accent1"/>
+          </a:lnRef>
+          <a:fillRef idx="3">
+            <a:schemeClr val="accent1"/>
+          </a:fillRef>
+          <a:effectRef idx="2">
+            <a:schemeClr val="accent1"/>
+          </a:effectRef>
+          <a:fontRef idx="minor">
+            <a:schemeClr val="lt1"/>
+          </a:fontRef>
+        </p:style>
+        <p:txBody>
+          <a:bodyPr rtlCol="0" anchor="ctr"/>
+          <a:lstStyle/>
+          <a:p>
+            <a:pPr algn="ctr"/>
+          </a:p>
+        </p:txBody>
+      </p:sp>
+      <p:sp>
+        <p:nvSpPr>
+          <p:cNvPr id="24" name="Rectangle 23"/>
+          <p:cNvSpPr/>
+          <p:nvPr/>
+        </p:nvSpPr>
+        <p:spPr>
+          <a:xfrm>
+            <a:off x="7351776" y="658368"/>
+            <a:ext cx="1463040" cy="1380000"/>
+          </a:xfrm>
+          <a:prstGeom prst="rect">
+            <a:avLst/>
+          </a:prstGeom>
+          <a:solidFill>
+            <a:srgbClr val="120A02"/>
+          </a:solidFill>
+          <a:ln w="19050">
+            <a:solidFill>
+              <a:srgbClr val="FFD700"/>
+            </a:solidFill>
+          </a:ln>
+        </p:spPr>
+        <p:style>
+          <a:lnRef idx="1">
+            <a:schemeClr val="accent1"/>
+          </a:lnRef>
+          <a:fillRef idx="3">
+            <a:schemeClr val="accent1"/>
+          </a:fillRef>
+          <a:effectRef idx="2">
+            <a:schemeClr val="accent1"/>
+          </a:effectRef>
+          <a:fontRef idx="minor">
+            <a:schemeClr val="lt1"/>
+          </a:fontRef>
+        </p:style>
+        <p:txBody>
+          <a:bodyPr rtlCol="0" anchor="ctr"/>
+          <a:lstStyle/>
+          <a:p>
+            <a:pPr algn="ctr"/>
+          </a:p>
+        </p:txBody>
+      </p:sp>
+      <p:sp>
+        <p:nvSpPr>
+          <p:cNvPr id="25" name="TextBox 24"/>
+          <p:cNvSpPr txBox="1"/>
+          <p:nvPr/>
+        </p:nvSpPr>
+        <p:spPr>
+          <a:xfrm>
+            <a:off x="7391776" y="718368"/>
+            <a:ext cx="1403040" cy="380000"/>
+          </a:xfrm>
+          <a:prstGeom prst="rect">
+            <a:avLst/>
+          </a:prstGeom>
+          <a:noFill/>
+        </p:spPr>
+        <p:txBody>
+          <a:bodyPr wrap="square">
+            <a:spAutoFit/>
+          </a:bodyPr>
+          <a:lstStyle/>
+          <a:p>
+            <a:pPr algn="ctr"/>
+            <a:r>
+              <a:rPr sz="950" b="1">
+                <a:solidFill>
+                  <a:srgbClr val="FFD700"/>
+                </a:solidFill>
+                <a:latin typeface="游明朝"/>
+              </a:rPr>
+              <a:t>継続 or
+無想転生</a:t>
+            </a:r>
+          </a:p>
+        </p:txBody>
+      </p:sp>
+      <p:sp>
+        <p:nvSpPr>
+          <p:cNvPr id="26" name="TextBox 25"/>
+          <p:cNvSpPr txBox="1"/>
+          <p:nvPr/>
+        </p:nvSpPr>
+        <p:spPr>
+          <a:xfrm>
+            <a:off x="7386776" y="1118368"/>
+            <a:ext cx="1408040" cy="820000"/>
+          </a:xfrm>
+          <a:prstGeom prst="rect">
+            <a:avLst/>
+          </a:prstGeom>
+          <a:noFill/>
+        </p:spPr>
+        <p:txBody>
+          <a:bodyPr wrap="square">
+            <a:spAutoFit/>
+          </a:bodyPr>
+          <a:lstStyle/>
+          <a:p>
+            <a:pPr algn="ctr"/>
+            <a:r>
+              <a:rPr sz="800" b="0">
+                <a:solidFill>
+                  <a:srgbClr val="E8E8F4"/>
+                </a:solidFill>
+                <a:latin typeface="メイリオ"/>
+              </a:rPr>
+              <a:t>継続→次セットBB
+約33%で無想転生
+チャンスへ突入</a:t>
+            </a:r>
+          </a:p>
+        </p:txBody>
+      </p:sp>
+      <p:sp>
+        <p:nvSpPr>
+          <p:cNvPr id="27" name="Rectangle 26"/>
+          <p:cNvSpPr/>
+          <p:nvPr/>
+        </p:nvSpPr>
+        <p:spPr>
+          <a:xfrm>
+            <a:off x="256032" y="2158368"/>
+            <a:ext cx="4114800" cy="2650000"/>
+          </a:xfrm>
+          <a:prstGeom prst="rect">
+            <a:avLst/>
+          </a:prstGeom>
+          <a:solidFill>
+            <a:srgbClr val="0C1228"/>
+          </a:solidFill>
+          <a:ln w="19050">
+            <a:solidFill>
+              <a:srgbClr val="22AA99"/>
+            </a:solidFill>
+          </a:ln>
+        </p:spPr>
+        <p:style>
+          <a:lnRef idx="1">
+            <a:schemeClr val="accent1"/>
+          </a:lnRef>
+          <a:fillRef idx="3">
+            <a:schemeClr val="accent1"/>
+          </a:fillRef>
+          <a:effectRef idx="2">
+            <a:schemeClr val="accent1"/>
+          </a:effectRef>
+          <a:fontRef idx="minor">
+            <a:schemeClr val="lt1"/>
+          </a:fontRef>
+        </p:style>
+        <p:txBody>
+          <a:bodyPr rtlCol="0" anchor="ctr"/>
+          <a:lstStyle/>
+          <a:p>
+            <a:pPr algn="ctr"/>
+          </a:p>
+        </p:txBody>
+      </p:sp>
+      <p:sp>
+        <p:nvSpPr>
+          <p:cNvPr id="28" name="Rectangle 27"/>
+          <p:cNvSpPr/>
+          <p:nvPr/>
+        </p:nvSpPr>
+        <p:spPr>
+          <a:xfrm>
+            <a:off x="256032" y="2158368"/>
+            <a:ext cx="45000" cy="2650000"/>
+          </a:xfrm>
+          <a:prstGeom prst="rect">
+            <a:avLst/>
+          </a:prstGeom>
+          <a:solidFill>
+            <a:srgbClr val="22AA99"/>
+          </a:solidFill>
+          <a:ln>
+            <a:noFill/>
+          </a:ln>
+        </p:spPr>
+        <p:style>
+          <a:lnRef idx="1">
+            <a:schemeClr val="accent1"/>
+          </a:lnRef>
+          <a:fillRef idx="3">
+            <a:schemeClr val="accent1"/>
+          </a:fillRef>
+          <a:effectRef idx="2">
+            <a:schemeClr val="accent1"/>
+          </a:effectRef>
+          <a:fontRef idx="minor">
+            <a:schemeClr val="lt1"/>
+          </a:fontRef>
+        </p:style>
+        <p:txBody>
+          <a:bodyPr rtlCol="0" anchor="ctr"/>
+          <a:lstStyle/>
+          <a:p>
+            <a:pPr algn="ctr"/>
+          </a:p>
+        </p:txBody>
+      </p:sp>
+      <p:sp>
+        <p:nvSpPr>
+          <p:cNvPr id="29" name="TextBox 28"/>
+          <p:cNvSpPr txBox="1"/>
+          <p:nvPr/>
+        </p:nvSpPr>
+        <p:spPr>
+          <a:xfrm>
+            <a:off x="331032" y="2203368"/>
+            <a:ext cx="4014800" cy="260000"/>
+          </a:xfrm>
+          <a:prstGeom prst="rect">
+            <a:avLst/>
+          </a:prstGeom>
+          <a:noFill/>
+        </p:spPr>
+        <p:txBody>
+          <a:bodyPr wrap="square">
+            <a:spAutoFit/>
+          </a:bodyPr>
+          <a:lstStyle/>
+          <a:p>
             <a:pPr algn="l"/>
             <a:r>
-              <a:rPr sz="850" b="1">
+              <a:rPr sz="1100" b="1">
+                <a:solidFill>
+                  <a:srgbClr val="22AA99"/>
+                </a:solidFill>
+                <a:latin typeface="游明朝"/>
+              </a:rPr>
+              <a:t>「自力感」の設計</a:t>
+            </a:r>
+          </a:p>
+        </p:txBody>
+      </p:sp>
+      <p:sp>
+        <p:nvSpPr>
+          <p:cNvPr id="30" name="TextBox 29"/>
+          <p:cNvSpPr txBox="1"/>
+          <p:nvPr/>
+        </p:nvSpPr>
+        <p:spPr>
+          <a:xfrm>
+            <a:off x="331032" y="2458368"/>
+            <a:ext cx="4014800" cy="2290000"/>
+          </a:xfrm>
+          <a:prstGeom prst="rect">
+            <a:avLst/>
+          </a:prstGeom>
+          <a:noFill/>
+        </p:spPr>
+        <p:txBody>
+          <a:bodyPr wrap="square">
+            <a:spAutoFit/>
+          </a:bodyPr>
+          <a:lstStyle/>
+          <a:p>
+            <a:pPr algn="l"/>
+            <a:r>
+              <a:rPr sz="800" b="0">
+                <a:solidFill>
+                  <a:srgbClr val="E8E8F4"/>
+                </a:solidFill>
+                <a:latin typeface="メイリオ"/>
+              </a:rPr>
+              <a:t>【宿命バトルの役どころ】
+リプレイ成立 → チャンス（勝利を期待）
+レア役成立   → 勝利確定
+中段チェリー/リーチ目 → アミババトル確定
+継続率はオーラで事前に「宣言」されるが、
+宿命バトルで自分が役を引くことで
+「自分が勝った」能動体験が生まれる。
+【バトルパート8G目の特別仕様】
+8G目にレア役→ユリア復活確定
+（継続率84%以上が確定する最大の自力演出）</a:t>
+            </a:r>
+          </a:p>
+        </p:txBody>
+      </p:sp>
+      <p:sp>
+        <p:nvSpPr>
+          <p:cNvPr id="31" name="Rectangle 30"/>
+          <p:cNvSpPr/>
+          <p:nvPr/>
+        </p:nvSpPr>
+        <p:spPr>
+          <a:xfrm>
+            <a:off x="4572000" y="2158368"/>
+            <a:ext cx="4297680" cy="2650000"/>
+          </a:xfrm>
+          <a:prstGeom prst="rect">
+            <a:avLst/>
+          </a:prstGeom>
+          <a:solidFill>
+            <a:srgbClr val="160404"/>
+          </a:solidFill>
+          <a:ln w="19050">
+            <a:solidFill>
+              <a:srgbClr val="FF3333"/>
+            </a:solidFill>
+          </a:ln>
+        </p:spPr>
+        <p:style>
+          <a:lnRef idx="1">
+            <a:schemeClr val="accent1"/>
+          </a:lnRef>
+          <a:fillRef idx="3">
+            <a:schemeClr val="accent1"/>
+          </a:fillRef>
+          <a:effectRef idx="2">
+            <a:schemeClr val="accent1"/>
+          </a:effectRef>
+          <a:fontRef idx="minor">
+            <a:schemeClr val="lt1"/>
+          </a:fontRef>
+        </p:style>
+        <p:txBody>
+          <a:bodyPr rtlCol="0" anchor="ctr"/>
+          <a:lstStyle/>
+          <a:p>
+            <a:pPr algn="ctr"/>
+          </a:p>
+        </p:txBody>
+      </p:sp>
+      <p:sp>
+        <p:nvSpPr>
+          <p:cNvPr id="32" name="Rectangle 31"/>
+          <p:cNvSpPr/>
+          <p:nvPr/>
+        </p:nvSpPr>
+        <p:spPr>
+          <a:xfrm>
+            <a:off x="4572000" y="2158368"/>
+            <a:ext cx="45000" cy="2650000"/>
+          </a:xfrm>
+          <a:prstGeom prst="rect">
+            <a:avLst/>
+          </a:prstGeom>
+          <a:solidFill>
+            <a:srgbClr val="FF3333"/>
+          </a:solidFill>
+          <a:ln>
+            <a:noFill/>
+          </a:ln>
+        </p:spPr>
+        <p:style>
+          <a:lnRef idx="1">
+            <a:schemeClr val="accent1"/>
+          </a:lnRef>
+          <a:fillRef idx="3">
+            <a:schemeClr val="accent1"/>
+          </a:fillRef>
+          <a:effectRef idx="2">
+            <a:schemeClr val="accent1"/>
+          </a:effectRef>
+          <a:fontRef idx="minor">
+            <a:schemeClr val="lt1"/>
+          </a:fontRef>
+        </p:style>
+        <p:txBody>
+          <a:bodyPr rtlCol="0" anchor="ctr"/>
+          <a:lstStyle/>
+          <a:p>
+            <a:pPr algn="ctr"/>
+          </a:p>
+        </p:txBody>
+      </p:sp>
+      <p:sp>
+        <p:nvSpPr>
+          <p:cNvPr id="33" name="TextBox 32"/>
+          <p:cNvSpPr txBox="1"/>
+          <p:nvPr/>
+        </p:nvSpPr>
+        <p:spPr>
+          <a:xfrm>
+            <a:off x="4647000" y="2203368"/>
+            <a:ext cx="4197680" cy="260000"/>
+          </a:xfrm>
+          <a:prstGeom prst="rect">
+            <a:avLst/>
+          </a:prstGeom>
+          <a:noFill/>
+        </p:spPr>
+        <p:txBody>
+          <a:bodyPr wrap="square">
+            <a:spAutoFit/>
+          </a:bodyPr>
+          <a:lstStyle/>
+          <a:p>
+            <a:pPr algn="l"/>
+            <a:r>
+              <a:rPr sz="1100" b="1">
                 <a:solidFill>
                   <a:srgbClr val="FF3333"/>
                 </a:solidFill>
+                <a:latin typeface="游明朝"/>
+              </a:rPr>
+              <a:t>「理不尽」を飲み込ませる設計</a:t>
+            </a:r>
+          </a:p>
+        </p:txBody>
+      </p:sp>
+      <p:sp>
+        <p:nvSpPr>
+          <p:cNvPr id="34" name="TextBox 33"/>
+          <p:cNvSpPr txBox="1"/>
+          <p:nvPr/>
+        </p:nvSpPr>
+        <p:spPr>
+          <a:xfrm>
+            <a:off x="4647000" y="2458368"/>
+            <a:ext cx="4197680" cy="2290000"/>
+          </a:xfrm>
+          <a:prstGeom prst="rect">
+            <a:avLst/>
+          </a:prstGeom>
+          <a:noFill/>
+        </p:spPr>
+        <p:txBody>
+          <a:bodyPr wrap="square">
+            <a:spAutoFit/>
+          </a:bodyPr>
+          <a:lstStyle/>
+          <a:p>
+            <a:pPr algn="l"/>
+            <a:r>
+              <a:rPr sz="800" b="0">
+                <a:solidFill>
+                  <a:srgbClr val="E8E8F4"/>
+                </a:solidFill>
                 <a:latin typeface="メイリオ"/>
               </a:rPr>
-              <a:t>→ 透明性の欠如は設計上のリスクファクター</a:t>
-            </a:r>
-          </a:p>
-        </p:txBody>
-      </p:sp>
-      <p:sp>
-        <p:nvSpPr>
-          <p:cNvPr id="33" name="TextBox 32"/>
+              <a:t>虹オーラ（89%継続）でも11%は終了する。
+これは設計的欠陥でなく「北斗の味」。
+なぜ受け入れられるか？
+① 「北斗あるある」という共有体験になる
+   → ホールでの会話・コミュニティ形成
+② 理不尽があるから連続継続の喜びが大きい
+   → リスクと報酬のメリハリが生まれる
+③ 4号機北斗の記憶と接続し
+   「それが北斗だ」とユーザー自身が
+   納得するIPの力</a:t>
+            </a:r>
+          </a:p>
+        </p:txBody>
+      </p:sp>
+      <p:sp>
+        <p:nvSpPr>
+          <p:cNvPr id="35" name="TextBox 34"/>
           <p:cNvSpPr txBox="1"/>
           <p:nvPr/>
         </p:nvSpPr>
@@ -11315,7 +11428,7 @@
                 </a:solidFill>
                 <a:latin typeface="游明朝"/>
               </a:rPr>
-              <a:t>設定判別 ── 実戦で使えるポイント</a:t>
+              <a:t>有利区間問題 ── 不透明な差枚管理への不満</a:t>
             </a:r>
           </a:p>
         </p:txBody>
@@ -11350,7 +11463,7 @@
                 </a:solidFill>
                 <a:latin typeface="メイリオ"/>
               </a:rPr>
-              <a:t>6/7</a:t>
+              <a:t>6/8</a:t>
             </a:r>
           </a:p>
         </p:txBody>
@@ -11407,7 +11520,52 @@
         <p:spPr>
           <a:xfrm>
             <a:off x="256032" y="658368"/>
-            <a:ext cx="2633472" cy="360000"/>
+            <a:ext cx="4114800" cy="1360000"/>
+          </a:xfrm>
+          <a:prstGeom prst="rect">
+            <a:avLst/>
+          </a:prstGeom>
+          <a:solidFill>
+            <a:srgbClr val="0C1228"/>
+          </a:solidFill>
+          <a:ln w="19050">
+            <a:solidFill>
+              <a:srgbClr val="BB1111"/>
+            </a:solidFill>
+          </a:ln>
+        </p:spPr>
+        <p:style>
+          <a:lnRef idx="1">
+            <a:schemeClr val="accent1"/>
+          </a:lnRef>
+          <a:fillRef idx="3">
+            <a:schemeClr val="accent1"/>
+          </a:fillRef>
+          <a:effectRef idx="2">
+            <a:schemeClr val="accent1"/>
+          </a:effectRef>
+          <a:fontRef idx="minor">
+            <a:schemeClr val="lt1"/>
+          </a:fontRef>
+        </p:style>
+        <p:txBody>
+          <a:bodyPr rtlCol="0" anchor="ctr"/>
+          <a:lstStyle/>
+          <a:p>
+            <a:pPr algn="ctr"/>
+          </a:p>
+        </p:txBody>
+      </p:sp>
+      <p:sp>
+        <p:nvSpPr>
+          <p:cNvPr id="9" name="Rectangle 8"/>
+          <p:cNvSpPr/>
+          <p:nvPr/>
+        </p:nvSpPr>
+        <p:spPr>
+          <a:xfrm>
+            <a:off x="256032" y="658368"/>
+            <a:ext cx="45000" cy="1360000"/>
           </a:xfrm>
           <a:prstGeom prst="rect">
             <a:avLst/>
@@ -11443,49 +11601,86 @@
       </p:sp>
       <p:sp>
         <p:nvSpPr>
-          <p:cNvPr id="9" name="TextBox 8"/>
-          <p:cNvSpPr txBox="1"/>
-          <p:nvPr/>
-        </p:nvSpPr>
-        <p:spPr>
-          <a:xfrm>
-            <a:off x="286032" y="703368"/>
-            <a:ext cx="2587752" cy="275000"/>
-          </a:xfrm>
-          <a:prstGeom prst="rect">
-            <a:avLst/>
-          </a:prstGeom>
-          <a:noFill/>
-        </p:spPr>
-        <p:txBody>
-          <a:bodyPr wrap="none">
-            <a:spAutoFit/>
-          </a:bodyPr>
-          <a:lstStyle/>
-          <a:p>
-            <a:pPr algn="ctr"/>
-            <a:r>
-              <a:rPr sz="950" b="1">
-                <a:solidFill>
-                  <a:srgbClr val="050818"/>
+          <p:cNvPr id="10" name="TextBox 9"/>
+          <p:cNvSpPr txBox="1"/>
+          <p:nvPr/>
+        </p:nvSpPr>
+        <p:spPr>
+          <a:xfrm>
+            <a:off x="336032" y="708368"/>
+            <a:ext cx="4014800" cy="260000"/>
+          </a:xfrm>
+          <a:prstGeom prst="rect">
+            <a:avLst/>
+          </a:prstGeom>
+          <a:noFill/>
+        </p:spPr>
+        <p:txBody>
+          <a:bodyPr wrap="square">
+            <a:spAutoFit/>
+          </a:bodyPr>
+          <a:lstStyle/>
+          <a:p>
+            <a:pPr algn="l"/>
+            <a:r>
+              <a:rPr sz="900" b="1">
+                <a:solidFill>
+                  <a:srgbClr val="BB1111"/>
                 </a:solidFill>
                 <a:latin typeface="メイリオ"/>
               </a:rPr>
-              <a:t>BB後モード移行</a:t>
-            </a:r>
-          </a:p>
-        </p:txBody>
-      </p:sp>
-      <p:sp>
-        <p:nvSpPr>
-          <p:cNvPr id="10" name="Rectangle 9"/>
+              <a:t>差枚管理の不透明さ</a:t>
+            </a:r>
+          </a:p>
+        </p:txBody>
+      </p:sp>
+      <p:sp>
+        <p:nvSpPr>
+          <p:cNvPr id="11" name="TextBox 10"/>
+          <p:cNvSpPr txBox="1"/>
+          <p:nvPr/>
+        </p:nvSpPr>
+        <p:spPr>
+          <a:xfrm>
+            <a:off x="336032" y="963368"/>
+            <a:ext cx="4014800" cy="950000"/>
+          </a:xfrm>
+          <a:prstGeom prst="rect">
+            <a:avLst/>
+          </a:prstGeom>
+          <a:noFill/>
+        </p:spPr>
+        <p:txBody>
+          <a:bodyPr wrap="square">
+            <a:spAutoFit/>
+          </a:bodyPr>
+          <a:lstStyle/>
+          <a:p>
+            <a:pPr algn="l"/>
+            <a:r>
+              <a:rPr sz="800" b="0">
+                <a:solidFill>
+                  <a:srgbClr val="E8E8F4"/>
+                </a:solidFill>
+                <a:latin typeface="メイリオ"/>
+              </a:rPr>
+              <a:t>有利区間内で差枚が上限付近（2,000枚前後）になると
+当選が重くなる「冷遇区間」の存在が語られる。
+公式は確率を一切公開していない。</a:t>
+            </a:r>
+          </a:p>
+        </p:txBody>
+      </p:sp>
+      <p:sp>
+        <p:nvSpPr>
+          <p:cNvPr id="12" name="Rectangle 11"/>
           <p:cNvSpPr/>
           <p:nvPr/>
         </p:nvSpPr>
         <p:spPr>
           <a:xfrm>
-            <a:off x="256032" y="1018368"/>
-            <a:ext cx="2633472" cy="1210000"/>
+            <a:off x="256032" y="2088368"/>
+            <a:ext cx="4114800" cy="1360000"/>
           </a:xfrm>
           <a:prstGeom prst="rect">
             <a:avLst/>
@@ -11493,9 +11688,9 @@
           <a:solidFill>
             <a:srgbClr val="0C1228"/>
           </a:solidFill>
-          <a:ln w="6350">
+          <a:ln w="19050">
             <a:solidFill>
-              <a:srgbClr val="BB1111"/>
+              <a:srgbClr val="444466"/>
             </a:solidFill>
           </a:ln>
         </p:spPr>
@@ -11523,97 +11718,23 @@
       </p:sp>
       <p:sp>
         <p:nvSpPr>
-          <p:cNvPr id="11" name="TextBox 10"/>
-          <p:cNvSpPr txBox="1"/>
-          <p:nvPr/>
-        </p:nvSpPr>
-        <p:spPr>
-          <a:xfrm>
-            <a:off x="306032" y="1073368"/>
-            <a:ext cx="2560320" cy="255000"/>
-          </a:xfrm>
-          <a:prstGeom prst="rect">
-            <a:avLst/>
-          </a:prstGeom>
-          <a:noFill/>
-        </p:spPr>
-        <p:txBody>
-          <a:bodyPr wrap="square">
-            <a:spAutoFit/>
-          </a:bodyPr>
-          <a:lstStyle/>
-          <a:p>
-            <a:pPr algn="l"/>
-            <a:r>
-              <a:rPr sz="850" b="1">
-                <a:solidFill>
-                  <a:srgbClr val="BB1111"/>
-                </a:solidFill>
-                <a:latin typeface="メイリオ"/>
-              </a:rPr>
-              <a:t>天国モード移行率</a:t>
-            </a:r>
-          </a:p>
-        </p:txBody>
-      </p:sp>
-      <p:sp>
-        <p:nvSpPr>
-          <p:cNvPr id="12" name="TextBox 11"/>
-          <p:cNvSpPr txBox="1"/>
-          <p:nvPr/>
-        </p:nvSpPr>
-        <p:spPr>
-          <a:xfrm>
-            <a:off x="306032" y="1323368"/>
-            <a:ext cx="2560320" cy="780000"/>
-          </a:xfrm>
-          <a:prstGeom prst="rect">
-            <a:avLst/>
-          </a:prstGeom>
-          <a:noFill/>
-        </p:spPr>
-        <p:txBody>
-          <a:bodyPr wrap="square">
-            <a:spAutoFit/>
-          </a:bodyPr>
-          <a:lstStyle/>
-          <a:p>
-            <a:pPr algn="l"/>
-            <a:r>
-              <a:rPr sz="800" b="0">
-                <a:solidFill>
-                  <a:srgbClr val="E8E8F4"/>
-                </a:solidFill>
-                <a:latin typeface="メイリオ"/>
-              </a:rPr>
-              <a:t>BB後に天国モード移行率が
-高設定ほど高い。
-複数BB後の展開速度で判断。</a:t>
-            </a:r>
-          </a:p>
-        </p:txBody>
-      </p:sp>
-      <p:sp>
-        <p:nvSpPr>
           <p:cNvPr id="13" name="Rectangle 12"/>
           <p:cNvSpPr/>
           <p:nvPr/>
         </p:nvSpPr>
         <p:spPr>
           <a:xfrm>
-            <a:off x="256032" y="2288368"/>
-            <a:ext cx="2633472" cy="1210000"/>
+            <a:off x="256032" y="2088368"/>
+            <a:ext cx="45000" cy="1360000"/>
           </a:xfrm>
           <a:prstGeom prst="rect">
             <a:avLst/>
           </a:prstGeom>
           <a:solidFill>
-            <a:srgbClr val="101630"/>
+            <a:srgbClr val="444466"/>
           </a:solidFill>
-          <a:ln w="6350">
-            <a:solidFill>
-              <a:srgbClr val="BB1111"/>
-            </a:solidFill>
+          <a:ln>
+            <a:noFill/>
           </a:ln>
         </p:spPr>
         <p:style>
@@ -11646,8 +11767,8 @@
         </p:nvSpPr>
         <p:spPr>
           <a:xfrm>
-            <a:off x="306032" y="2343368"/>
-            <a:ext cx="2560320" cy="255000"/>
+            <a:off x="336032" y="2138368"/>
+            <a:ext cx="4014800" cy="260000"/>
           </a:xfrm>
           <a:prstGeom prst="rect">
             <a:avLst/>
@@ -11662,13 +11783,13 @@
           <a:p>
             <a:pPr algn="l"/>
             <a:r>
-              <a:rPr sz="850" b="1">
-                <a:solidFill>
-                  <a:srgbClr val="BB1111"/>
+              <a:rPr sz="900" b="1">
+                <a:solidFill>
+                  <a:srgbClr val="444466"/>
                 </a:solidFill>
                 <a:latin typeface="メイリオ"/>
               </a:rPr>
-              <a:t>地獄モード率</a:t>
+              <a:t>天然終了か冷遇終了か判断できない</a:t>
             </a:r>
           </a:p>
         </p:txBody>
@@ -11681,8 +11802,8 @@
         </p:nvSpPr>
         <p:spPr>
           <a:xfrm>
-            <a:off x="306032" y="2593368"/>
-            <a:ext cx="2560320" cy="780000"/>
+            <a:off x="336032" y="2393368"/>
+            <a:ext cx="4014800" cy="950000"/>
           </a:xfrm>
           <a:prstGeom prst="rect">
             <a:avLst/>
@@ -11703,9 +11824,9 @@
                 </a:solidFill>
                 <a:latin typeface="メイリオ"/>
               </a:rPr>
-              <a:t>低設定ほどBB後に地獄モードへ
-落ちやすい。当選が遅い場合は
-低設定の可能性。</a:t>
+              <a:t>有利区間終了の原因が差枚管理なのか
+単純な不運なのか、ユーザーには区別できない。
+この不透明さがデキレ・冷遇論争を継続させる。</a:t>
             </a:r>
           </a:p>
         </p:txBody>
@@ -11718,8 +11839,8 @@
         </p:nvSpPr>
         <p:spPr>
           <a:xfrm>
-            <a:off x="256032" y="3558368"/>
-            <a:ext cx="2633472" cy="1210000"/>
+            <a:off x="256032" y="3518368"/>
+            <a:ext cx="4114800" cy="1360000"/>
           </a:xfrm>
           <a:prstGeom prst="rect">
             <a:avLst/>
@@ -11727,9 +11848,9 @@
           <a:solidFill>
             <a:srgbClr val="0C1228"/>
           </a:solidFill>
-          <a:ln w="6350">
+          <a:ln w="19050">
             <a:solidFill>
-              <a:srgbClr val="BB1111"/>
+              <a:srgbClr val="444466"/>
             </a:solidFill>
           </a:ln>
         </p:spPr>
@@ -11757,92 +11878,20 @@
       </p:sp>
       <p:sp>
         <p:nvSpPr>
-          <p:cNvPr id="17" name="TextBox 16"/>
-          <p:cNvSpPr txBox="1"/>
-          <p:nvPr/>
-        </p:nvSpPr>
-        <p:spPr>
-          <a:xfrm>
-            <a:off x="306032" y="3613368"/>
-            <a:ext cx="2560320" cy="255000"/>
-          </a:xfrm>
-          <a:prstGeom prst="rect">
-            <a:avLst/>
-          </a:prstGeom>
-          <a:noFill/>
-        </p:spPr>
-        <p:txBody>
-          <a:bodyPr wrap="square">
-            <a:spAutoFit/>
-          </a:bodyPr>
-          <a:lstStyle/>
-          <a:p>
-            <a:pPr algn="l"/>
-            <a:r>
-              <a:rPr sz="850" b="1">
-                <a:solidFill>
-                  <a:srgbClr val="BB1111"/>
-                </a:solidFill>
-                <a:latin typeface="メイリオ"/>
-              </a:rPr>
-              <a:t>前兆の発生タイミング</a:t>
-            </a:r>
-          </a:p>
-        </p:txBody>
-      </p:sp>
-      <p:sp>
-        <p:nvSpPr>
-          <p:cNvPr id="18" name="TextBox 17"/>
-          <p:cNvSpPr txBox="1"/>
-          <p:nvPr/>
-        </p:nvSpPr>
-        <p:spPr>
-          <a:xfrm>
-            <a:off x="306032" y="3863368"/>
-            <a:ext cx="2560320" cy="780000"/>
-          </a:xfrm>
-          <a:prstGeom prst="rect">
-            <a:avLst/>
-          </a:prstGeom>
-          <a:noFill/>
-        </p:spPr>
-        <p:txBody>
-          <a:bodyPr wrap="square">
-            <a:spAutoFit/>
-          </a:bodyPr>
-          <a:lstStyle/>
-          <a:p>
-            <a:pPr algn="l"/>
-            <a:r>
-              <a:rPr sz="800" b="0">
-                <a:solidFill>
-                  <a:srgbClr val="E8E8F4"/>
-                </a:solidFill>
-                <a:latin typeface="メイリオ"/>
-              </a:rPr>
-              <a:t>天国→前兆が頻繁に発生する台は
-高設定の可能性あり。
-通常時のゲーム数に注目。</a:t>
-            </a:r>
-          </a:p>
-        </p:txBody>
-      </p:sp>
-      <p:sp>
-        <p:nvSpPr>
-          <p:cNvPr id="19" name="Rectangle 18"/>
+          <p:cNvPr id="17" name="Rectangle 16"/>
           <p:cNvSpPr/>
           <p:nvPr/>
         </p:nvSpPr>
         <p:spPr>
           <a:xfrm>
-            <a:off x="3182112" y="658368"/>
-            <a:ext cx="2633472" cy="360000"/>
+            <a:off x="256032" y="3518368"/>
+            <a:ext cx="45000" cy="1360000"/>
           </a:xfrm>
           <a:prstGeom prst="rect">
             <a:avLst/>
           </a:prstGeom>
           <a:solidFill>
-            <a:srgbClr val="C8A840"/>
+            <a:srgbClr val="444466"/>
           </a:solidFill>
           <a:ln>
             <a:noFill/>
@@ -11872,60 +11921,95 @@
       </p:sp>
       <p:sp>
         <p:nvSpPr>
-          <p:cNvPr id="20" name="TextBox 19"/>
-          <p:cNvSpPr txBox="1"/>
-          <p:nvPr/>
-        </p:nvSpPr>
-        <p:spPr>
-          <a:xfrm>
-            <a:off x="3212112" y="703368"/>
-            <a:ext cx="2587752" cy="275000"/>
-          </a:xfrm>
-          <a:prstGeom prst="rect">
-            <a:avLst/>
-          </a:prstGeom>
-          <a:noFill/>
-        </p:spPr>
-        <p:txBody>
-          <a:bodyPr wrap="none">
-            <a:spAutoFit/>
-          </a:bodyPr>
-          <a:lstStyle/>
-          <a:p>
-            <a:pPr algn="ctr"/>
-            <a:r>
-              <a:rPr sz="950" b="1">
-                <a:solidFill>
-                  <a:srgbClr val="050818"/>
+          <p:cNvPr id="18" name="TextBox 17"/>
+          <p:cNvSpPr txBox="1"/>
+          <p:nvPr/>
+        </p:nvSpPr>
+        <p:spPr>
+          <a:xfrm>
+            <a:off x="336032" y="3568368"/>
+            <a:ext cx="4014800" cy="260000"/>
+          </a:xfrm>
+          <a:prstGeom prst="rect">
+            <a:avLst/>
+          </a:prstGeom>
+          <a:noFill/>
+        </p:spPr>
+        <p:txBody>
+          <a:bodyPr wrap="square">
+            <a:spAutoFit/>
+          </a:bodyPr>
+          <a:lstStyle/>
+          <a:p>
+            <a:pPr algn="l"/>
+            <a:r>
+              <a:rPr sz="900" b="1">
+                <a:solidFill>
+                  <a:srgbClr val="444466"/>
                 </a:solidFill>
                 <a:latin typeface="メイリオ"/>
               </a:rPr>
-              <a:t>特定獲得枚数</a:t>
-            </a:r>
-          </a:p>
-        </p:txBody>
-      </p:sp>
-      <p:sp>
-        <p:nvSpPr>
-          <p:cNvPr id="21" name="Rectangle 20"/>
+              <a:t>無想転生後の「壁」体験</a:t>
+            </a:r>
+          </a:p>
+        </p:txBody>
+      </p:sp>
+      <p:sp>
+        <p:nvSpPr>
+          <p:cNvPr id="19" name="TextBox 18"/>
+          <p:cNvSpPr txBox="1"/>
+          <p:nvPr/>
+        </p:nvSpPr>
+        <p:spPr>
+          <a:xfrm>
+            <a:off x="336032" y="3823368"/>
+            <a:ext cx="4014800" cy="950000"/>
+          </a:xfrm>
+          <a:prstGeom prst="rect">
+            <a:avLst/>
+          </a:prstGeom>
+          <a:noFill/>
+        </p:spPr>
+        <p:txBody>
+          <a:bodyPr wrap="square">
+            <a:spAutoFit/>
+          </a:bodyPr>
+          <a:lstStyle/>
+          <a:p>
+            <a:pPr algn="l"/>
+            <a:r>
+              <a:rPr sz="800" b="0">
+                <a:solidFill>
+                  <a:srgbClr val="E8E8F4"/>
+                </a:solidFill>
+                <a:latin typeface="メイリオ"/>
+              </a:rPr>
+              <a:t>大量獲得後に急に当たらなくなる体験が
+「冷遇だ」と解釈される。実際の確率変動か
+運なのかは不明のまま。</a:t>
+            </a:r>
+          </a:p>
+        </p:txBody>
+      </p:sp>
+      <p:sp>
+        <p:nvSpPr>
+          <p:cNvPr id="20" name="Rectangle 19"/>
           <p:cNvSpPr/>
           <p:nvPr/>
         </p:nvSpPr>
         <p:spPr>
           <a:xfrm>
-            <a:off x="3182112" y="1018368"/>
-            <a:ext cx="2633472" cy="1210000"/>
+            <a:off x="4572000" y="658368"/>
+            <a:ext cx="4297680" cy="530000"/>
           </a:xfrm>
           <a:prstGeom prst="rect">
             <a:avLst/>
           </a:prstGeom>
           <a:solidFill>
-            <a:srgbClr val="0C1228"/>
+            <a:srgbClr val="880000"/>
           </a:solidFill>
-          <a:ln w="6350">
-            <a:solidFill>
-              <a:srgbClr val="C8A840"/>
-            </a:solidFill>
+          <a:ln>
+            <a:noFill/>
           </a:ln>
         </p:spPr>
         <p:style>
@@ -11952,14 +12036,49 @@
       </p:sp>
       <p:sp>
         <p:nvSpPr>
+          <p:cNvPr id="21" name="TextBox 20"/>
+          <p:cNvSpPr txBox="1"/>
+          <p:nvPr/>
+        </p:nvSpPr>
+        <p:spPr>
+          <a:xfrm>
+            <a:off x="4632000" y="713368"/>
+            <a:ext cx="4217680" cy="240000"/>
+          </a:xfrm>
+          <a:prstGeom prst="rect">
+            <a:avLst/>
+          </a:prstGeom>
+          <a:noFill/>
+        </p:spPr>
+        <p:txBody>
+          <a:bodyPr wrap="square">
+            <a:spAutoFit/>
+          </a:bodyPr>
+          <a:lstStyle/>
+          <a:p>
+            <a:pPr algn="l"/>
+            <a:r>
+              <a:rPr sz="1100" b="1">
+                <a:solidFill>
+                  <a:srgbClr val="C8A840"/>
+                </a:solidFill>
+                <a:latin typeface="游明朝"/>
+              </a:rPr>
+              <a:t>なぜ議論が続くのか？</a:t>
+            </a:r>
+          </a:p>
+        </p:txBody>
+      </p:sp>
+      <p:sp>
+        <p:nvSpPr>
           <p:cNvPr id="22" name="TextBox 21"/>
           <p:cNvSpPr txBox="1"/>
           <p:nvPr/>
         </p:nvSpPr>
         <p:spPr>
           <a:xfrm>
-            <a:off x="3232112" y="1073368"/>
-            <a:ext cx="2560320" cy="255000"/>
+            <a:off x="4632000" y="948368"/>
+            <a:ext cx="4217680" cy="210000"/>
           </a:xfrm>
           <a:prstGeom prst="rect">
             <a:avLst/>
@@ -11974,75 +12093,36 @@
           <a:p>
             <a:pPr algn="l"/>
             <a:r>
-              <a:rPr sz="850" b="1">
-                <a:solidFill>
-                  <a:srgbClr val="C8A840"/>
+              <a:rPr sz="850" b="0">
+                <a:solidFill>
+                  <a:srgbClr val="D0C0A0"/>
                 </a:solidFill>
                 <a:latin typeface="メイリオ"/>
               </a:rPr>
-              <a:t>456枚以上獲得</a:t>
-            </a:r>
-          </a:p>
-        </p:txBody>
-      </p:sp>
-      <p:sp>
-        <p:nvSpPr>
-          <p:cNvPr id="23" name="TextBox 22"/>
-          <p:cNvSpPr txBox="1"/>
-          <p:nvPr/>
-        </p:nvSpPr>
-        <p:spPr>
-          <a:xfrm>
-            <a:off x="3232112" y="1323368"/>
-            <a:ext cx="2560320" cy="780000"/>
-          </a:xfrm>
-          <a:prstGeom prst="rect">
-            <a:avLst/>
-          </a:prstGeom>
-          <a:noFill/>
-        </p:spPr>
-        <p:txBody>
-          <a:bodyPr wrap="square">
-            <a:spAutoFit/>
-          </a:bodyPr>
-          <a:lstStyle/>
-          <a:p>
-            <a:pPr algn="l"/>
-            <a:r>
-              <a:rPr sz="800" b="0">
-                <a:solidFill>
-                  <a:srgbClr val="E8E8F4"/>
-                </a:solidFill>
-                <a:latin typeface="メイリオ"/>
-              </a:rPr>
-              <a:t>BB1回で456枚以上獲得した場合、
-設定4以上が確定。
-BB中の表示枚数に注目。</a:t>
-            </a:r>
-          </a:p>
-        </p:txBody>
-      </p:sp>
-      <p:sp>
-        <p:nvSpPr>
-          <p:cNvPr id="24" name="Rectangle 23"/>
+              <a:t>有利区間の「見えない壁」が信頼を侵食する</a:t>
+            </a:r>
+          </a:p>
+        </p:txBody>
+      </p:sp>
+      <p:sp>
+        <p:nvSpPr>
+          <p:cNvPr id="23" name="Rectangle 22"/>
           <p:cNvSpPr/>
           <p:nvPr/>
         </p:nvSpPr>
         <p:spPr>
           <a:xfrm>
-            <a:off x="3182112" y="2288368"/>
-            <a:ext cx="2633472" cy="1210000"/>
+            <a:off x="4572000" y="1188368"/>
+            <a:ext cx="18000" cy="490000"/>
           </a:xfrm>
           <a:prstGeom prst="rect">
             <a:avLst/>
           </a:prstGeom>
           <a:solidFill>
-            <a:srgbClr val="101630"/>
+            <a:srgbClr val="444466"/>
           </a:solidFill>
-          <a:ln w="6350">
-            <a:solidFill>
-              <a:srgbClr val="C8A840"/>
-            </a:solidFill>
+          <a:ln>
+            <a:noFill/>
           </a:ln>
         </p:spPr>
         <p:style>
@@ -12069,14 +12149,14 @@
       </p:sp>
       <p:sp>
         <p:nvSpPr>
-          <p:cNvPr id="25" name="TextBox 24"/>
-          <p:cNvSpPr txBox="1"/>
-          <p:nvPr/>
-        </p:nvSpPr>
-        <p:spPr>
-          <a:xfrm>
-            <a:off x="3232112" y="2343368"/>
-            <a:ext cx="2560320" cy="255000"/>
+          <p:cNvPr id="24" name="TextBox 23"/>
+          <p:cNvSpPr txBox="1"/>
+          <p:nvPr/>
+        </p:nvSpPr>
+        <p:spPr>
+          <a:xfrm>
+            <a:off x="4622000" y="1268368"/>
+            <a:ext cx="4237680" cy="380000"/>
           </a:xfrm>
           <a:prstGeom prst="rect">
             <a:avLst/>
@@ -12091,75 +12171,36 @@
           <a:p>
             <a:pPr algn="l"/>
             <a:r>
-              <a:rPr sz="850" b="1">
-                <a:solidFill>
-                  <a:srgbClr val="C8A840"/>
+              <a:rPr sz="850" b="0">
+                <a:solidFill>
+                  <a:srgbClr val="E8E8F4"/>
                 </a:solidFill>
                 <a:latin typeface="メイリオ"/>
               </a:rPr>
-              <a:t>666枚以上獲得</a:t>
-            </a:r>
-          </a:p>
-        </p:txBody>
-      </p:sp>
-      <p:sp>
-        <p:nvSpPr>
-          <p:cNvPr id="26" name="TextBox 25"/>
-          <p:cNvSpPr txBox="1"/>
-          <p:nvPr/>
-        </p:nvSpPr>
-        <p:spPr>
-          <a:xfrm>
-            <a:off x="3232112" y="2593368"/>
-            <a:ext cx="2560320" cy="780000"/>
-          </a:xfrm>
-          <a:prstGeom prst="rect">
-            <a:avLst/>
-          </a:prstGeom>
-          <a:noFill/>
-        </p:spPr>
-        <p:txBody>
-          <a:bodyPr wrap="square">
-            <a:spAutoFit/>
-          </a:bodyPr>
-          <a:lstStyle/>
-          <a:p>
-            <a:pPr algn="l"/>
-            <a:r>
-              <a:rPr sz="800" b="0">
-                <a:solidFill>
-                  <a:srgbClr val="E8E8F4"/>
-                </a:solidFill>
-                <a:latin typeface="メイリオ"/>
-              </a:rPr>
-              <a:t>BB1回で666枚以上獲得した場合、
-設定6が確定。
-最強の設定確定演出。</a:t>
-            </a:r>
-          </a:p>
-        </p:txBody>
-      </p:sp>
-      <p:sp>
-        <p:nvSpPr>
-          <p:cNvPr id="27" name="Rectangle 26"/>
+              <a:t>スロット台への期待感は「公平性への信頼」が前提</a:t>
+            </a:r>
+          </a:p>
+        </p:txBody>
+      </p:sp>
+      <p:sp>
+        <p:nvSpPr>
+          <p:cNvPr id="25" name="Rectangle 24"/>
           <p:cNvSpPr/>
           <p:nvPr/>
         </p:nvSpPr>
         <p:spPr>
           <a:xfrm>
-            <a:off x="3182112" y="3558368"/>
-            <a:ext cx="2633472" cy="1210000"/>
+            <a:off x="4572000" y="1728368"/>
+            <a:ext cx="18000" cy="490000"/>
           </a:xfrm>
           <a:prstGeom prst="rect">
             <a:avLst/>
           </a:prstGeom>
           <a:solidFill>
-            <a:srgbClr val="0C1228"/>
+            <a:srgbClr val="444466"/>
           </a:solidFill>
-          <a:ln w="6350">
-            <a:solidFill>
-              <a:srgbClr val="C8A840"/>
-            </a:solidFill>
+          <a:ln>
+            <a:noFill/>
           </a:ln>
         </p:spPr>
         <p:style>
@@ -12186,14 +12227,14 @@
       </p:sp>
       <p:sp>
         <p:nvSpPr>
-          <p:cNvPr id="28" name="TextBox 27"/>
-          <p:cNvSpPr txBox="1"/>
-          <p:nvPr/>
-        </p:nvSpPr>
-        <p:spPr>
-          <a:xfrm>
-            <a:off x="3232112" y="3613368"/>
-            <a:ext cx="2560320" cy="255000"/>
+          <p:cNvPr id="26" name="TextBox 25"/>
+          <p:cNvSpPr txBox="1"/>
+          <p:nvPr/>
+        </p:nvSpPr>
+        <p:spPr>
+          <a:xfrm>
+            <a:off x="4622000" y="1808368"/>
+            <a:ext cx="4237680" cy="380000"/>
           </a:xfrm>
           <a:prstGeom prst="rect">
             <a:avLst/>
@@ -12208,70 +12249,33 @@
           <a:p>
             <a:pPr algn="l"/>
             <a:r>
-              <a:rPr sz="850" b="1">
-                <a:solidFill>
-                  <a:srgbClr val="C8A840"/>
+              <a:rPr sz="850" b="0">
+                <a:solidFill>
+                  <a:srgbClr val="E8E8F4"/>
                 </a:solidFill>
                 <a:latin typeface="メイリオ"/>
               </a:rPr>
-              <a:t>複数回の確認で精度UP</a:t>
-            </a:r>
-          </a:p>
-        </p:txBody>
-      </p:sp>
-      <p:sp>
-        <p:nvSpPr>
-          <p:cNvPr id="29" name="TextBox 28"/>
-          <p:cNvSpPr txBox="1"/>
-          <p:nvPr/>
-        </p:nvSpPr>
-        <p:spPr>
-          <a:xfrm>
-            <a:off x="3232112" y="3863368"/>
-            <a:ext cx="2560320" cy="780000"/>
-          </a:xfrm>
-          <a:prstGeom prst="rect">
-            <a:avLst/>
-          </a:prstGeom>
-          <a:noFill/>
-        </p:spPr>
-        <p:txBody>
-          <a:bodyPr wrap="square">
-            <a:spAutoFit/>
-          </a:bodyPr>
-          <a:lstStyle/>
-          <a:p>
-            <a:pPr algn="l"/>
-            <a:r>
-              <a:rPr sz="800" b="0">
-                <a:solidFill>
-                  <a:srgbClr val="E8E8F4"/>
-                </a:solidFill>
-                <a:latin typeface="メイリオ"/>
-              </a:rPr>
-              <a:t>単発では偶然もあるため、
-複数BB後のデータを積み上げて
-総合的に判断する。</a:t>
-            </a:r>
-          </a:p>
-        </p:txBody>
-      </p:sp>
-      <p:sp>
-        <p:nvSpPr>
-          <p:cNvPr id="30" name="Rectangle 29"/>
+              <a:t>確率非公開 + 差枚管理 = 陰謀論が育つ環境</a:t>
+            </a:r>
+          </a:p>
+        </p:txBody>
+      </p:sp>
+      <p:sp>
+        <p:nvSpPr>
+          <p:cNvPr id="27" name="Rectangle 26"/>
           <p:cNvSpPr/>
           <p:nvPr/>
         </p:nvSpPr>
         <p:spPr>
           <a:xfrm>
-            <a:off x="6108192" y="658368"/>
-            <a:ext cx="2633472" cy="360000"/>
+            <a:off x="4572000" y="2268368"/>
+            <a:ext cx="18000" cy="490000"/>
           </a:xfrm>
           <a:prstGeom prst="rect">
             <a:avLst/>
           </a:prstGeom>
           <a:solidFill>
-            <a:srgbClr val="22AA99"/>
+            <a:srgbClr val="444466"/>
           </a:solidFill>
           <a:ln>
             <a:noFill/>
@@ -12301,60 +12305,58 @@
       </p:sp>
       <p:sp>
         <p:nvSpPr>
-          <p:cNvPr id="31" name="TextBox 30"/>
-          <p:cNvSpPr txBox="1"/>
-          <p:nvPr/>
-        </p:nvSpPr>
-        <p:spPr>
-          <a:xfrm>
-            <a:off x="6138192" y="703368"/>
-            <a:ext cx="2587752" cy="275000"/>
-          </a:xfrm>
-          <a:prstGeom prst="rect">
-            <a:avLst/>
-          </a:prstGeom>
-          <a:noFill/>
-        </p:spPr>
-        <p:txBody>
-          <a:bodyPr wrap="none">
-            <a:spAutoFit/>
-          </a:bodyPr>
-          <a:lstStyle/>
-          <a:p>
-            <a:pPr algn="ctr"/>
-            <a:r>
-              <a:rPr sz="950" b="1">
-                <a:solidFill>
-                  <a:srgbClr val="050818"/>
+          <p:cNvPr id="28" name="TextBox 27"/>
+          <p:cNvSpPr txBox="1"/>
+          <p:nvPr/>
+        </p:nvSpPr>
+        <p:spPr>
+          <a:xfrm>
+            <a:off x="4622000" y="2348368"/>
+            <a:ext cx="4237680" cy="380000"/>
+          </a:xfrm>
+          <a:prstGeom prst="rect">
+            <a:avLst/>
+          </a:prstGeom>
+          <a:noFill/>
+        </p:spPr>
+        <p:txBody>
+          <a:bodyPr wrap="square">
+            <a:spAutoFit/>
+          </a:bodyPr>
+          <a:lstStyle/>
+          <a:p>
+            <a:pPr algn="l"/>
+            <a:r>
+              <a:rPr sz="850" b="0">
+                <a:solidFill>
+                  <a:srgbClr val="E8E8F4"/>
                 </a:solidFill>
                 <a:latin typeface="メイリオ"/>
               </a:rPr>
-              <a:t>BB中の演出示唆</a:t>
-            </a:r>
-          </a:p>
-        </p:txBody>
-      </p:sp>
-      <p:sp>
-        <p:nvSpPr>
-          <p:cNvPr id="32" name="Rectangle 31"/>
+              <a:t>設定6でも負ける体験が「デキレ」解釈を生む</a:t>
+            </a:r>
+          </a:p>
+        </p:txBody>
+      </p:sp>
+      <p:sp>
+        <p:nvSpPr>
+          <p:cNvPr id="29" name="Rectangle 28"/>
           <p:cNvSpPr/>
           <p:nvPr/>
         </p:nvSpPr>
         <p:spPr>
           <a:xfrm>
-            <a:off x="6108192" y="1018368"/>
-            <a:ext cx="2633472" cy="1210000"/>
+            <a:off x="4572000" y="2808368"/>
+            <a:ext cx="18000" cy="490000"/>
           </a:xfrm>
           <a:prstGeom prst="rect">
             <a:avLst/>
           </a:prstGeom>
           <a:solidFill>
-            <a:srgbClr val="0C1228"/>
+            <a:srgbClr val="444466"/>
           </a:solidFill>
-          <a:ln w="6350">
-            <a:solidFill>
-              <a:srgbClr val="22AA99"/>
-            </a:solidFill>
+          <a:ln>
+            <a:noFill/>
           </a:ln>
         </p:spPr>
         <p:style>
@@ -12381,14 +12383,14 @@
       </p:sp>
       <p:sp>
         <p:nvSpPr>
-          <p:cNvPr id="33" name="TextBox 32"/>
-          <p:cNvSpPr txBox="1"/>
-          <p:nvPr/>
-        </p:nvSpPr>
-        <p:spPr>
-          <a:xfrm>
-            <a:off x="6158192" y="1073368"/>
-            <a:ext cx="2560320" cy="255000"/>
+          <p:cNvPr id="30" name="TextBox 29"/>
+          <p:cNvSpPr txBox="1"/>
+          <p:nvPr/>
+        </p:nvSpPr>
+        <p:spPr>
+          <a:xfrm>
+            <a:off x="4622000" y="2888368"/>
+            <a:ext cx="4237680" cy="380000"/>
           </a:xfrm>
           <a:prstGeom prst="rect">
             <a:avLst/>
@@ -12403,75 +12405,36 @@
           <a:p>
             <a:pPr algn="l"/>
             <a:r>
-              <a:rPr sz="850" b="1">
-                <a:solidFill>
-                  <a:srgbClr val="22AA99"/>
+              <a:rPr sz="850" b="0">
+                <a:solidFill>
+                  <a:srgbClr val="E8E8F4"/>
                 </a:solidFill>
                 <a:latin typeface="メイリオ"/>
               </a:rPr>
-              <a:t>宿命バトル中のレア役</a:t>
-            </a:r>
-          </a:p>
-        </p:txBody>
-      </p:sp>
-      <p:sp>
-        <p:nvSpPr>
-          <p:cNvPr id="34" name="TextBox 33"/>
-          <p:cNvSpPr txBox="1"/>
-          <p:nvPr/>
-        </p:nvSpPr>
-        <p:spPr>
-          <a:xfrm>
-            <a:off x="6158192" y="1323368"/>
-            <a:ext cx="2560320" cy="780000"/>
-          </a:xfrm>
-          <a:prstGeom prst="rect">
-            <a:avLst/>
-          </a:prstGeom>
-          <a:noFill/>
-        </p:spPr>
-        <p:txBody>
-          <a:bodyPr wrap="square">
-            <a:spAutoFit/>
-          </a:bodyPr>
-          <a:lstStyle/>
-          <a:p>
-            <a:pPr algn="l"/>
-            <a:r>
-              <a:rPr sz="800" b="0">
-                <a:solidFill>
-                  <a:srgbClr val="E8E8F4"/>
-                </a:solidFill>
-                <a:latin typeface="メイリオ"/>
-              </a:rPr>
-              <a:t>小役パート中のレア役出現率に
-設定差。高設定ほど
-宿命バトルに勝ちやすい傾向。</a:t>
-            </a:r>
-          </a:p>
-        </p:txBody>
-      </p:sp>
-      <p:sp>
-        <p:nvSpPr>
-          <p:cNvPr id="35" name="Rectangle 34"/>
+              <a:t>長期稼働にはなっているが、コアユーザーの不信感は残る</a:t>
+            </a:r>
+          </a:p>
+        </p:txBody>
+      </p:sp>
+      <p:sp>
+        <p:nvSpPr>
+          <p:cNvPr id="31" name="Rectangle 30"/>
           <p:cNvSpPr/>
           <p:nvPr/>
         </p:nvSpPr>
         <p:spPr>
           <a:xfrm>
-            <a:off x="6108192" y="2288368"/>
-            <a:ext cx="2633472" cy="1210000"/>
+            <a:off x="4572000" y="3348368"/>
+            <a:ext cx="18000" cy="490000"/>
           </a:xfrm>
           <a:prstGeom prst="rect">
             <a:avLst/>
           </a:prstGeom>
           <a:solidFill>
-            <a:srgbClr val="101630"/>
+            <a:srgbClr val="BB1111"/>
           </a:solidFill>
-          <a:ln w="6350">
-            <a:solidFill>
-              <a:srgbClr val="22AA99"/>
-            </a:solidFill>
+          <a:ln>
+            <a:noFill/>
           </a:ln>
         </p:spPr>
         <p:style>
@@ -12498,14 +12461,14 @@
       </p:sp>
       <p:sp>
         <p:nvSpPr>
-          <p:cNvPr id="36" name="TextBox 35"/>
-          <p:cNvSpPr txBox="1"/>
-          <p:nvPr/>
-        </p:nvSpPr>
-        <p:spPr>
-          <a:xfrm>
-            <a:off x="6158192" y="2343368"/>
-            <a:ext cx="2560320" cy="255000"/>
+          <p:cNvPr id="32" name="TextBox 31"/>
+          <p:cNvSpPr txBox="1"/>
+          <p:nvPr/>
+        </p:nvSpPr>
+        <p:spPr>
+          <a:xfrm>
+            <a:off x="4622000" y="3428368"/>
+            <a:ext cx="4237680" cy="380000"/>
           </a:xfrm>
           <a:prstGeom prst="rect">
             <a:avLst/>
@@ -12522,172 +12485,18 @@
             <a:r>
               <a:rPr sz="850" b="1">
                 <a:solidFill>
-                  <a:srgbClr val="22AA99"/>
+                  <a:srgbClr val="FF3333"/>
                 </a:solidFill>
                 <a:latin typeface="メイリオ"/>
               </a:rPr>
-              <a:t>Vストック獲得率</a:t>
-            </a:r>
-          </a:p>
-        </p:txBody>
-      </p:sp>
-      <p:sp>
-        <p:nvSpPr>
-          <p:cNvPr id="37" name="TextBox 36"/>
-          <p:cNvSpPr txBox="1"/>
-          <p:nvPr/>
-        </p:nvSpPr>
-        <p:spPr>
-          <a:xfrm>
-            <a:off x="6158192" y="2593368"/>
-            <a:ext cx="2560320" cy="780000"/>
-          </a:xfrm>
-          <a:prstGeom prst="rect">
-            <a:avLst/>
-          </a:prstGeom>
-          <a:noFill/>
-        </p:spPr>
-        <p:txBody>
-          <a:bodyPr wrap="square">
-            <a:spAutoFit/>
-          </a:bodyPr>
-          <a:lstStyle/>
-          <a:p>
-            <a:pPr algn="l"/>
-            <a:r>
-              <a:rPr sz="800" b="0">
-                <a:solidFill>
-                  <a:srgbClr val="E8E8F4"/>
-                </a:solidFill>
-                <a:latin typeface="メイリオ"/>
-              </a:rPr>
-              <a:t>Vストック取得頻度が高い台は
-高設定の可能性。
-協力ループ発生率も参考に。</a:t>
-            </a:r>
-          </a:p>
-        </p:txBody>
-      </p:sp>
-      <p:sp>
-        <p:nvSpPr>
-          <p:cNvPr id="38" name="Rectangle 37"/>
-          <p:cNvSpPr/>
-          <p:nvPr/>
-        </p:nvSpPr>
-        <p:spPr>
-          <a:xfrm>
-            <a:off x="6108192" y="3558368"/>
-            <a:ext cx="2633472" cy="1210000"/>
-          </a:xfrm>
-          <a:prstGeom prst="rect">
-            <a:avLst/>
-          </a:prstGeom>
-          <a:solidFill>
-            <a:srgbClr val="0C1228"/>
-          </a:solidFill>
-          <a:ln w="6350">
-            <a:solidFill>
-              <a:srgbClr val="22AA99"/>
-            </a:solidFill>
-          </a:ln>
-        </p:spPr>
-        <p:style>
-          <a:lnRef idx="1">
-            <a:schemeClr val="accent1"/>
-          </a:lnRef>
-          <a:fillRef idx="3">
-            <a:schemeClr val="accent1"/>
-          </a:fillRef>
-          <a:effectRef idx="2">
-            <a:schemeClr val="accent1"/>
-          </a:effectRef>
-          <a:fontRef idx="minor">
-            <a:schemeClr val="lt1"/>
-          </a:fontRef>
-        </p:style>
-        <p:txBody>
-          <a:bodyPr rtlCol="0" anchor="ctr"/>
-          <a:lstStyle/>
-          <a:p>
-            <a:pPr algn="ctr"/>
-          </a:p>
-        </p:txBody>
-      </p:sp>
-      <p:sp>
-        <p:nvSpPr>
-          <p:cNvPr id="39" name="TextBox 38"/>
-          <p:cNvSpPr txBox="1"/>
-          <p:nvPr/>
-        </p:nvSpPr>
-        <p:spPr>
-          <a:xfrm>
-            <a:off x="6158192" y="3613368"/>
-            <a:ext cx="2560320" cy="255000"/>
-          </a:xfrm>
-          <a:prstGeom prst="rect">
-            <a:avLst/>
-          </a:prstGeom>
-          <a:noFill/>
-        </p:spPr>
-        <p:txBody>
-          <a:bodyPr wrap="square">
-            <a:spAutoFit/>
-          </a:bodyPr>
-          <a:lstStyle/>
-          <a:p>
-            <a:pPr algn="l"/>
-            <a:r>
-              <a:rPr sz="850" b="1">
-                <a:solidFill>
-                  <a:srgbClr val="22AA99"/>
-                </a:solidFill>
-                <a:latin typeface="メイリオ"/>
-              </a:rPr>
-              <a:t>無想転生チャンス</a:t>
-            </a:r>
-          </a:p>
-        </p:txBody>
-      </p:sp>
-      <p:sp>
-        <p:nvSpPr>
-          <p:cNvPr id="40" name="TextBox 39"/>
-          <p:cNvSpPr txBox="1"/>
-          <p:nvPr/>
-        </p:nvSpPr>
-        <p:spPr>
-          <a:xfrm>
-            <a:off x="6158192" y="3863368"/>
-            <a:ext cx="2560320" cy="780000"/>
-          </a:xfrm>
-          <a:prstGeom prst="rect">
-            <a:avLst/>
-          </a:prstGeom>
-          <a:noFill/>
-        </p:spPr>
-        <p:txBody>
-          <a:bodyPr wrap="square">
-            <a:spAutoFit/>
-          </a:bodyPr>
-          <a:lstStyle/>
-          <a:p>
-            <a:pPr algn="l"/>
-            <a:r>
-              <a:rPr sz="800" b="0">
-                <a:solidFill>
-                  <a:srgbClr val="E8E8F4"/>
-                </a:solidFill>
-                <a:latin typeface="メイリオ"/>
-              </a:rPr>
-              <a:t>無想転生チャンス成功率に
-設定差あり。設定6ほど
-突入しやすい。</a:t>
-            </a:r>
-          </a:p>
-        </p:txBody>
-      </p:sp>
-      <p:sp>
-        <p:nvSpPr>
-          <p:cNvPr id="41" name="TextBox 40"/>
+              <a:t>→ 透明性の欠如は設計上のリスクファクター</a:t>
+            </a:r>
+          </a:p>
+        </p:txBody>
+      </p:sp>
+      <p:sp>
+        <p:nvSpPr>
+          <p:cNvPr id="33" name="TextBox 32"/>
           <p:cNvSpPr txBox="1"/>
           <p:nvPr/>
         </p:nvSpPr>
@@ -12878,7 +12687,7 @@
                 </a:solidFill>
                 <a:latin typeface="游明朝"/>
               </a:rPr>
-              <a:t>まとめ ── 設計から学べること</a:t>
+              <a:t>設定判別 ── 実戦で使えるポイント</a:t>
             </a:r>
           </a:p>
         </p:txBody>
@@ -12913,7 +12722,1570 @@
                 </a:solidFill>
                 <a:latin typeface="メイリオ"/>
               </a:rPr>
-              <a:t>7/7</a:t>
+              <a:t>7/8</a:t>
+            </a:r>
+          </a:p>
+        </p:txBody>
+      </p:sp>
+      <p:sp>
+        <p:nvSpPr>
+          <p:cNvPr id="7" name="Rectangle 6"/>
+          <p:cNvSpPr/>
+          <p:nvPr/>
+        </p:nvSpPr>
+        <p:spPr>
+          <a:xfrm>
+            <a:off x="0" y="530352"/>
+            <a:ext cx="9144000" cy="7000"/>
+          </a:xfrm>
+          <a:prstGeom prst="rect">
+            <a:avLst/>
+          </a:prstGeom>
+          <a:solidFill>
+            <a:srgbClr val="BB1111"/>
+          </a:solidFill>
+          <a:ln>
+            <a:noFill/>
+          </a:ln>
+        </p:spPr>
+        <p:style>
+          <a:lnRef idx="1">
+            <a:schemeClr val="accent1"/>
+          </a:lnRef>
+          <a:fillRef idx="3">
+            <a:schemeClr val="accent1"/>
+          </a:fillRef>
+          <a:effectRef idx="2">
+            <a:schemeClr val="accent1"/>
+          </a:effectRef>
+          <a:fontRef idx="minor">
+            <a:schemeClr val="lt1"/>
+          </a:fontRef>
+        </p:style>
+        <p:txBody>
+          <a:bodyPr rtlCol="0" anchor="ctr"/>
+          <a:lstStyle/>
+          <a:p>
+            <a:pPr algn="ctr"/>
+          </a:p>
+        </p:txBody>
+      </p:sp>
+      <p:sp>
+        <p:nvSpPr>
+          <p:cNvPr id="8" name="Rectangle 7"/>
+          <p:cNvSpPr/>
+          <p:nvPr/>
+        </p:nvSpPr>
+        <p:spPr>
+          <a:xfrm>
+            <a:off x="256032" y="658368"/>
+            <a:ext cx="2633472" cy="360000"/>
+          </a:xfrm>
+          <a:prstGeom prst="rect">
+            <a:avLst/>
+          </a:prstGeom>
+          <a:solidFill>
+            <a:srgbClr val="BB1111"/>
+          </a:solidFill>
+          <a:ln>
+            <a:noFill/>
+          </a:ln>
+        </p:spPr>
+        <p:style>
+          <a:lnRef idx="1">
+            <a:schemeClr val="accent1"/>
+          </a:lnRef>
+          <a:fillRef idx="3">
+            <a:schemeClr val="accent1"/>
+          </a:fillRef>
+          <a:effectRef idx="2">
+            <a:schemeClr val="accent1"/>
+          </a:effectRef>
+          <a:fontRef idx="minor">
+            <a:schemeClr val="lt1"/>
+          </a:fontRef>
+        </p:style>
+        <p:txBody>
+          <a:bodyPr rtlCol="0" anchor="ctr"/>
+          <a:lstStyle/>
+          <a:p>
+            <a:pPr algn="ctr"/>
+          </a:p>
+        </p:txBody>
+      </p:sp>
+      <p:sp>
+        <p:nvSpPr>
+          <p:cNvPr id="9" name="TextBox 8"/>
+          <p:cNvSpPr txBox="1"/>
+          <p:nvPr/>
+        </p:nvSpPr>
+        <p:spPr>
+          <a:xfrm>
+            <a:off x="286032" y="703368"/>
+            <a:ext cx="2587752" cy="275000"/>
+          </a:xfrm>
+          <a:prstGeom prst="rect">
+            <a:avLst/>
+          </a:prstGeom>
+          <a:noFill/>
+        </p:spPr>
+        <p:txBody>
+          <a:bodyPr wrap="none">
+            <a:spAutoFit/>
+          </a:bodyPr>
+          <a:lstStyle/>
+          <a:p>
+            <a:pPr algn="ctr"/>
+            <a:r>
+              <a:rPr sz="950" b="1">
+                <a:solidFill>
+                  <a:srgbClr val="050818"/>
+                </a:solidFill>
+                <a:latin typeface="メイリオ"/>
+              </a:rPr>
+              <a:t>BB後モード移行</a:t>
+            </a:r>
+          </a:p>
+        </p:txBody>
+      </p:sp>
+      <p:sp>
+        <p:nvSpPr>
+          <p:cNvPr id="10" name="Rectangle 9"/>
+          <p:cNvSpPr/>
+          <p:nvPr/>
+        </p:nvSpPr>
+        <p:spPr>
+          <a:xfrm>
+            <a:off x="256032" y="1018368"/>
+            <a:ext cx="2633472" cy="1210000"/>
+          </a:xfrm>
+          <a:prstGeom prst="rect">
+            <a:avLst/>
+          </a:prstGeom>
+          <a:solidFill>
+            <a:srgbClr val="0C1228"/>
+          </a:solidFill>
+          <a:ln w="6350">
+            <a:solidFill>
+              <a:srgbClr val="BB1111"/>
+            </a:solidFill>
+          </a:ln>
+        </p:spPr>
+        <p:style>
+          <a:lnRef idx="1">
+            <a:schemeClr val="accent1"/>
+          </a:lnRef>
+          <a:fillRef idx="3">
+            <a:schemeClr val="accent1"/>
+          </a:fillRef>
+          <a:effectRef idx="2">
+            <a:schemeClr val="accent1"/>
+          </a:effectRef>
+          <a:fontRef idx="minor">
+            <a:schemeClr val="lt1"/>
+          </a:fontRef>
+        </p:style>
+        <p:txBody>
+          <a:bodyPr rtlCol="0" anchor="ctr"/>
+          <a:lstStyle/>
+          <a:p>
+            <a:pPr algn="ctr"/>
+          </a:p>
+        </p:txBody>
+      </p:sp>
+      <p:sp>
+        <p:nvSpPr>
+          <p:cNvPr id="11" name="TextBox 10"/>
+          <p:cNvSpPr txBox="1"/>
+          <p:nvPr/>
+        </p:nvSpPr>
+        <p:spPr>
+          <a:xfrm>
+            <a:off x="306032" y="1073368"/>
+            <a:ext cx="2560320" cy="255000"/>
+          </a:xfrm>
+          <a:prstGeom prst="rect">
+            <a:avLst/>
+          </a:prstGeom>
+          <a:noFill/>
+        </p:spPr>
+        <p:txBody>
+          <a:bodyPr wrap="square">
+            <a:spAutoFit/>
+          </a:bodyPr>
+          <a:lstStyle/>
+          <a:p>
+            <a:pPr algn="l"/>
+            <a:r>
+              <a:rPr sz="850" b="1">
+                <a:solidFill>
+                  <a:srgbClr val="BB1111"/>
+                </a:solidFill>
+                <a:latin typeface="メイリオ"/>
+              </a:rPr>
+              <a:t>天国モード移行率</a:t>
+            </a:r>
+          </a:p>
+        </p:txBody>
+      </p:sp>
+      <p:sp>
+        <p:nvSpPr>
+          <p:cNvPr id="12" name="TextBox 11"/>
+          <p:cNvSpPr txBox="1"/>
+          <p:nvPr/>
+        </p:nvSpPr>
+        <p:spPr>
+          <a:xfrm>
+            <a:off x="306032" y="1323368"/>
+            <a:ext cx="2560320" cy="780000"/>
+          </a:xfrm>
+          <a:prstGeom prst="rect">
+            <a:avLst/>
+          </a:prstGeom>
+          <a:noFill/>
+        </p:spPr>
+        <p:txBody>
+          <a:bodyPr wrap="square">
+            <a:spAutoFit/>
+          </a:bodyPr>
+          <a:lstStyle/>
+          <a:p>
+            <a:pPr algn="l"/>
+            <a:r>
+              <a:rPr sz="800" b="0">
+                <a:solidFill>
+                  <a:srgbClr val="E8E8F4"/>
+                </a:solidFill>
+                <a:latin typeface="メイリオ"/>
+              </a:rPr>
+              <a:t>BB後に天国モード移行率が
+高設定ほど高い。
+複数BB後の展開速度で判断。</a:t>
+            </a:r>
+          </a:p>
+        </p:txBody>
+      </p:sp>
+      <p:sp>
+        <p:nvSpPr>
+          <p:cNvPr id="13" name="Rectangle 12"/>
+          <p:cNvSpPr/>
+          <p:nvPr/>
+        </p:nvSpPr>
+        <p:spPr>
+          <a:xfrm>
+            <a:off x="256032" y="2288368"/>
+            <a:ext cx="2633472" cy="1210000"/>
+          </a:xfrm>
+          <a:prstGeom prst="rect">
+            <a:avLst/>
+          </a:prstGeom>
+          <a:solidFill>
+            <a:srgbClr val="101630"/>
+          </a:solidFill>
+          <a:ln w="6350">
+            <a:solidFill>
+              <a:srgbClr val="BB1111"/>
+            </a:solidFill>
+          </a:ln>
+        </p:spPr>
+        <p:style>
+          <a:lnRef idx="1">
+            <a:schemeClr val="accent1"/>
+          </a:lnRef>
+          <a:fillRef idx="3">
+            <a:schemeClr val="accent1"/>
+          </a:fillRef>
+          <a:effectRef idx="2">
+            <a:schemeClr val="accent1"/>
+          </a:effectRef>
+          <a:fontRef idx="minor">
+            <a:schemeClr val="lt1"/>
+          </a:fontRef>
+        </p:style>
+        <p:txBody>
+          <a:bodyPr rtlCol="0" anchor="ctr"/>
+          <a:lstStyle/>
+          <a:p>
+            <a:pPr algn="ctr"/>
+          </a:p>
+        </p:txBody>
+      </p:sp>
+      <p:sp>
+        <p:nvSpPr>
+          <p:cNvPr id="14" name="TextBox 13"/>
+          <p:cNvSpPr txBox="1"/>
+          <p:nvPr/>
+        </p:nvSpPr>
+        <p:spPr>
+          <a:xfrm>
+            <a:off x="306032" y="2343368"/>
+            <a:ext cx="2560320" cy="255000"/>
+          </a:xfrm>
+          <a:prstGeom prst="rect">
+            <a:avLst/>
+          </a:prstGeom>
+          <a:noFill/>
+        </p:spPr>
+        <p:txBody>
+          <a:bodyPr wrap="square">
+            <a:spAutoFit/>
+          </a:bodyPr>
+          <a:lstStyle/>
+          <a:p>
+            <a:pPr algn="l"/>
+            <a:r>
+              <a:rPr sz="850" b="1">
+                <a:solidFill>
+                  <a:srgbClr val="BB1111"/>
+                </a:solidFill>
+                <a:latin typeface="メイリオ"/>
+              </a:rPr>
+              <a:t>地獄モード率</a:t>
+            </a:r>
+          </a:p>
+        </p:txBody>
+      </p:sp>
+      <p:sp>
+        <p:nvSpPr>
+          <p:cNvPr id="15" name="TextBox 14"/>
+          <p:cNvSpPr txBox="1"/>
+          <p:nvPr/>
+        </p:nvSpPr>
+        <p:spPr>
+          <a:xfrm>
+            <a:off x="306032" y="2593368"/>
+            <a:ext cx="2560320" cy="780000"/>
+          </a:xfrm>
+          <a:prstGeom prst="rect">
+            <a:avLst/>
+          </a:prstGeom>
+          <a:noFill/>
+        </p:spPr>
+        <p:txBody>
+          <a:bodyPr wrap="square">
+            <a:spAutoFit/>
+          </a:bodyPr>
+          <a:lstStyle/>
+          <a:p>
+            <a:pPr algn="l"/>
+            <a:r>
+              <a:rPr sz="800" b="0">
+                <a:solidFill>
+                  <a:srgbClr val="E8E8F4"/>
+                </a:solidFill>
+                <a:latin typeface="メイリオ"/>
+              </a:rPr>
+              <a:t>低設定ほどBB後に地獄モードへ
+落ちやすい。当選が遅い場合は
+低設定の可能性。</a:t>
+            </a:r>
+          </a:p>
+        </p:txBody>
+      </p:sp>
+      <p:sp>
+        <p:nvSpPr>
+          <p:cNvPr id="16" name="Rectangle 15"/>
+          <p:cNvSpPr/>
+          <p:nvPr/>
+        </p:nvSpPr>
+        <p:spPr>
+          <a:xfrm>
+            <a:off x="256032" y="3558368"/>
+            <a:ext cx="2633472" cy="1210000"/>
+          </a:xfrm>
+          <a:prstGeom prst="rect">
+            <a:avLst/>
+          </a:prstGeom>
+          <a:solidFill>
+            <a:srgbClr val="0C1228"/>
+          </a:solidFill>
+          <a:ln w="6350">
+            <a:solidFill>
+              <a:srgbClr val="BB1111"/>
+            </a:solidFill>
+          </a:ln>
+        </p:spPr>
+        <p:style>
+          <a:lnRef idx="1">
+            <a:schemeClr val="accent1"/>
+          </a:lnRef>
+          <a:fillRef idx="3">
+            <a:schemeClr val="accent1"/>
+          </a:fillRef>
+          <a:effectRef idx="2">
+            <a:schemeClr val="accent1"/>
+          </a:effectRef>
+          <a:fontRef idx="minor">
+            <a:schemeClr val="lt1"/>
+          </a:fontRef>
+        </p:style>
+        <p:txBody>
+          <a:bodyPr rtlCol="0" anchor="ctr"/>
+          <a:lstStyle/>
+          <a:p>
+            <a:pPr algn="ctr"/>
+          </a:p>
+        </p:txBody>
+      </p:sp>
+      <p:sp>
+        <p:nvSpPr>
+          <p:cNvPr id="17" name="TextBox 16"/>
+          <p:cNvSpPr txBox="1"/>
+          <p:nvPr/>
+        </p:nvSpPr>
+        <p:spPr>
+          <a:xfrm>
+            <a:off x="306032" y="3613368"/>
+            <a:ext cx="2560320" cy="255000"/>
+          </a:xfrm>
+          <a:prstGeom prst="rect">
+            <a:avLst/>
+          </a:prstGeom>
+          <a:noFill/>
+        </p:spPr>
+        <p:txBody>
+          <a:bodyPr wrap="square">
+            <a:spAutoFit/>
+          </a:bodyPr>
+          <a:lstStyle/>
+          <a:p>
+            <a:pPr algn="l"/>
+            <a:r>
+              <a:rPr sz="850" b="1">
+                <a:solidFill>
+                  <a:srgbClr val="BB1111"/>
+                </a:solidFill>
+                <a:latin typeface="メイリオ"/>
+              </a:rPr>
+              <a:t>前兆の発生タイミング</a:t>
+            </a:r>
+          </a:p>
+        </p:txBody>
+      </p:sp>
+      <p:sp>
+        <p:nvSpPr>
+          <p:cNvPr id="18" name="TextBox 17"/>
+          <p:cNvSpPr txBox="1"/>
+          <p:nvPr/>
+        </p:nvSpPr>
+        <p:spPr>
+          <a:xfrm>
+            <a:off x="306032" y="3863368"/>
+            <a:ext cx="2560320" cy="780000"/>
+          </a:xfrm>
+          <a:prstGeom prst="rect">
+            <a:avLst/>
+          </a:prstGeom>
+          <a:noFill/>
+        </p:spPr>
+        <p:txBody>
+          <a:bodyPr wrap="square">
+            <a:spAutoFit/>
+          </a:bodyPr>
+          <a:lstStyle/>
+          <a:p>
+            <a:pPr algn="l"/>
+            <a:r>
+              <a:rPr sz="800" b="0">
+                <a:solidFill>
+                  <a:srgbClr val="E8E8F4"/>
+                </a:solidFill>
+                <a:latin typeface="メイリオ"/>
+              </a:rPr>
+              <a:t>天国→前兆が頻繁に発生する台は
+高設定の可能性あり。
+通常時のゲーム数に注目。</a:t>
+            </a:r>
+          </a:p>
+        </p:txBody>
+      </p:sp>
+      <p:sp>
+        <p:nvSpPr>
+          <p:cNvPr id="19" name="Rectangle 18"/>
+          <p:cNvSpPr/>
+          <p:nvPr/>
+        </p:nvSpPr>
+        <p:spPr>
+          <a:xfrm>
+            <a:off x="3182112" y="658368"/>
+            <a:ext cx="2633472" cy="360000"/>
+          </a:xfrm>
+          <a:prstGeom prst="rect">
+            <a:avLst/>
+          </a:prstGeom>
+          <a:solidFill>
+            <a:srgbClr val="C8A840"/>
+          </a:solidFill>
+          <a:ln>
+            <a:noFill/>
+          </a:ln>
+        </p:spPr>
+        <p:style>
+          <a:lnRef idx="1">
+            <a:schemeClr val="accent1"/>
+          </a:lnRef>
+          <a:fillRef idx="3">
+            <a:schemeClr val="accent1"/>
+          </a:fillRef>
+          <a:effectRef idx="2">
+            <a:schemeClr val="accent1"/>
+          </a:effectRef>
+          <a:fontRef idx="minor">
+            <a:schemeClr val="lt1"/>
+          </a:fontRef>
+        </p:style>
+        <p:txBody>
+          <a:bodyPr rtlCol="0" anchor="ctr"/>
+          <a:lstStyle/>
+          <a:p>
+            <a:pPr algn="ctr"/>
+          </a:p>
+        </p:txBody>
+      </p:sp>
+      <p:sp>
+        <p:nvSpPr>
+          <p:cNvPr id="20" name="TextBox 19"/>
+          <p:cNvSpPr txBox="1"/>
+          <p:nvPr/>
+        </p:nvSpPr>
+        <p:spPr>
+          <a:xfrm>
+            <a:off x="3212112" y="703368"/>
+            <a:ext cx="2587752" cy="275000"/>
+          </a:xfrm>
+          <a:prstGeom prst="rect">
+            <a:avLst/>
+          </a:prstGeom>
+          <a:noFill/>
+        </p:spPr>
+        <p:txBody>
+          <a:bodyPr wrap="none">
+            <a:spAutoFit/>
+          </a:bodyPr>
+          <a:lstStyle/>
+          <a:p>
+            <a:pPr algn="ctr"/>
+            <a:r>
+              <a:rPr sz="950" b="1">
+                <a:solidFill>
+                  <a:srgbClr val="050818"/>
+                </a:solidFill>
+                <a:latin typeface="メイリオ"/>
+              </a:rPr>
+              <a:t>特定獲得枚数</a:t>
+            </a:r>
+          </a:p>
+        </p:txBody>
+      </p:sp>
+      <p:sp>
+        <p:nvSpPr>
+          <p:cNvPr id="21" name="Rectangle 20"/>
+          <p:cNvSpPr/>
+          <p:nvPr/>
+        </p:nvSpPr>
+        <p:spPr>
+          <a:xfrm>
+            <a:off x="3182112" y="1018368"/>
+            <a:ext cx="2633472" cy="1210000"/>
+          </a:xfrm>
+          <a:prstGeom prst="rect">
+            <a:avLst/>
+          </a:prstGeom>
+          <a:solidFill>
+            <a:srgbClr val="0C1228"/>
+          </a:solidFill>
+          <a:ln w="6350">
+            <a:solidFill>
+              <a:srgbClr val="C8A840"/>
+            </a:solidFill>
+          </a:ln>
+        </p:spPr>
+        <p:style>
+          <a:lnRef idx="1">
+            <a:schemeClr val="accent1"/>
+          </a:lnRef>
+          <a:fillRef idx="3">
+            <a:schemeClr val="accent1"/>
+          </a:fillRef>
+          <a:effectRef idx="2">
+            <a:schemeClr val="accent1"/>
+          </a:effectRef>
+          <a:fontRef idx="minor">
+            <a:schemeClr val="lt1"/>
+          </a:fontRef>
+        </p:style>
+        <p:txBody>
+          <a:bodyPr rtlCol="0" anchor="ctr"/>
+          <a:lstStyle/>
+          <a:p>
+            <a:pPr algn="ctr"/>
+          </a:p>
+        </p:txBody>
+      </p:sp>
+      <p:sp>
+        <p:nvSpPr>
+          <p:cNvPr id="22" name="TextBox 21"/>
+          <p:cNvSpPr txBox="1"/>
+          <p:nvPr/>
+        </p:nvSpPr>
+        <p:spPr>
+          <a:xfrm>
+            <a:off x="3232112" y="1073368"/>
+            <a:ext cx="2560320" cy="255000"/>
+          </a:xfrm>
+          <a:prstGeom prst="rect">
+            <a:avLst/>
+          </a:prstGeom>
+          <a:noFill/>
+        </p:spPr>
+        <p:txBody>
+          <a:bodyPr wrap="square">
+            <a:spAutoFit/>
+          </a:bodyPr>
+          <a:lstStyle/>
+          <a:p>
+            <a:pPr algn="l"/>
+            <a:r>
+              <a:rPr sz="850" b="1">
+                <a:solidFill>
+                  <a:srgbClr val="C8A840"/>
+                </a:solidFill>
+                <a:latin typeface="メイリオ"/>
+              </a:rPr>
+              <a:t>456枚以上獲得</a:t>
+            </a:r>
+          </a:p>
+        </p:txBody>
+      </p:sp>
+      <p:sp>
+        <p:nvSpPr>
+          <p:cNvPr id="23" name="TextBox 22"/>
+          <p:cNvSpPr txBox="1"/>
+          <p:nvPr/>
+        </p:nvSpPr>
+        <p:spPr>
+          <a:xfrm>
+            <a:off x="3232112" y="1323368"/>
+            <a:ext cx="2560320" cy="780000"/>
+          </a:xfrm>
+          <a:prstGeom prst="rect">
+            <a:avLst/>
+          </a:prstGeom>
+          <a:noFill/>
+        </p:spPr>
+        <p:txBody>
+          <a:bodyPr wrap="square">
+            <a:spAutoFit/>
+          </a:bodyPr>
+          <a:lstStyle/>
+          <a:p>
+            <a:pPr algn="l"/>
+            <a:r>
+              <a:rPr sz="800" b="0">
+                <a:solidFill>
+                  <a:srgbClr val="E8E8F4"/>
+                </a:solidFill>
+                <a:latin typeface="メイリオ"/>
+              </a:rPr>
+              <a:t>BB1回で456枚以上獲得した場合、
+設定4以上が確定。
+BB中の表示枚数に注目。</a:t>
+            </a:r>
+          </a:p>
+        </p:txBody>
+      </p:sp>
+      <p:sp>
+        <p:nvSpPr>
+          <p:cNvPr id="24" name="Rectangle 23"/>
+          <p:cNvSpPr/>
+          <p:nvPr/>
+        </p:nvSpPr>
+        <p:spPr>
+          <a:xfrm>
+            <a:off x="3182112" y="2288368"/>
+            <a:ext cx="2633472" cy="1210000"/>
+          </a:xfrm>
+          <a:prstGeom prst="rect">
+            <a:avLst/>
+          </a:prstGeom>
+          <a:solidFill>
+            <a:srgbClr val="101630"/>
+          </a:solidFill>
+          <a:ln w="6350">
+            <a:solidFill>
+              <a:srgbClr val="C8A840"/>
+            </a:solidFill>
+          </a:ln>
+        </p:spPr>
+        <p:style>
+          <a:lnRef idx="1">
+            <a:schemeClr val="accent1"/>
+          </a:lnRef>
+          <a:fillRef idx="3">
+            <a:schemeClr val="accent1"/>
+          </a:fillRef>
+          <a:effectRef idx="2">
+            <a:schemeClr val="accent1"/>
+          </a:effectRef>
+          <a:fontRef idx="minor">
+            <a:schemeClr val="lt1"/>
+          </a:fontRef>
+        </p:style>
+        <p:txBody>
+          <a:bodyPr rtlCol="0" anchor="ctr"/>
+          <a:lstStyle/>
+          <a:p>
+            <a:pPr algn="ctr"/>
+          </a:p>
+        </p:txBody>
+      </p:sp>
+      <p:sp>
+        <p:nvSpPr>
+          <p:cNvPr id="25" name="TextBox 24"/>
+          <p:cNvSpPr txBox="1"/>
+          <p:nvPr/>
+        </p:nvSpPr>
+        <p:spPr>
+          <a:xfrm>
+            <a:off x="3232112" y="2343368"/>
+            <a:ext cx="2560320" cy="255000"/>
+          </a:xfrm>
+          <a:prstGeom prst="rect">
+            <a:avLst/>
+          </a:prstGeom>
+          <a:noFill/>
+        </p:spPr>
+        <p:txBody>
+          <a:bodyPr wrap="square">
+            <a:spAutoFit/>
+          </a:bodyPr>
+          <a:lstStyle/>
+          <a:p>
+            <a:pPr algn="l"/>
+            <a:r>
+              <a:rPr sz="850" b="1">
+                <a:solidFill>
+                  <a:srgbClr val="C8A840"/>
+                </a:solidFill>
+                <a:latin typeface="メイリオ"/>
+              </a:rPr>
+              <a:t>666枚以上獲得</a:t>
+            </a:r>
+          </a:p>
+        </p:txBody>
+      </p:sp>
+      <p:sp>
+        <p:nvSpPr>
+          <p:cNvPr id="26" name="TextBox 25"/>
+          <p:cNvSpPr txBox="1"/>
+          <p:nvPr/>
+        </p:nvSpPr>
+        <p:spPr>
+          <a:xfrm>
+            <a:off x="3232112" y="2593368"/>
+            <a:ext cx="2560320" cy="780000"/>
+          </a:xfrm>
+          <a:prstGeom prst="rect">
+            <a:avLst/>
+          </a:prstGeom>
+          <a:noFill/>
+        </p:spPr>
+        <p:txBody>
+          <a:bodyPr wrap="square">
+            <a:spAutoFit/>
+          </a:bodyPr>
+          <a:lstStyle/>
+          <a:p>
+            <a:pPr algn="l"/>
+            <a:r>
+              <a:rPr sz="800" b="0">
+                <a:solidFill>
+                  <a:srgbClr val="E8E8F4"/>
+                </a:solidFill>
+                <a:latin typeface="メイリオ"/>
+              </a:rPr>
+              <a:t>BB1回で666枚以上獲得した場合、
+設定6が確定。
+最強の設定確定演出。</a:t>
+            </a:r>
+          </a:p>
+        </p:txBody>
+      </p:sp>
+      <p:sp>
+        <p:nvSpPr>
+          <p:cNvPr id="27" name="Rectangle 26"/>
+          <p:cNvSpPr/>
+          <p:nvPr/>
+        </p:nvSpPr>
+        <p:spPr>
+          <a:xfrm>
+            <a:off x="3182112" y="3558368"/>
+            <a:ext cx="2633472" cy="1210000"/>
+          </a:xfrm>
+          <a:prstGeom prst="rect">
+            <a:avLst/>
+          </a:prstGeom>
+          <a:solidFill>
+            <a:srgbClr val="0C1228"/>
+          </a:solidFill>
+          <a:ln w="6350">
+            <a:solidFill>
+              <a:srgbClr val="C8A840"/>
+            </a:solidFill>
+          </a:ln>
+        </p:spPr>
+        <p:style>
+          <a:lnRef idx="1">
+            <a:schemeClr val="accent1"/>
+          </a:lnRef>
+          <a:fillRef idx="3">
+            <a:schemeClr val="accent1"/>
+          </a:fillRef>
+          <a:effectRef idx="2">
+            <a:schemeClr val="accent1"/>
+          </a:effectRef>
+          <a:fontRef idx="minor">
+            <a:schemeClr val="lt1"/>
+          </a:fontRef>
+        </p:style>
+        <p:txBody>
+          <a:bodyPr rtlCol="0" anchor="ctr"/>
+          <a:lstStyle/>
+          <a:p>
+            <a:pPr algn="ctr"/>
+          </a:p>
+        </p:txBody>
+      </p:sp>
+      <p:sp>
+        <p:nvSpPr>
+          <p:cNvPr id="28" name="TextBox 27"/>
+          <p:cNvSpPr txBox="1"/>
+          <p:nvPr/>
+        </p:nvSpPr>
+        <p:spPr>
+          <a:xfrm>
+            <a:off x="3232112" y="3613368"/>
+            <a:ext cx="2560320" cy="255000"/>
+          </a:xfrm>
+          <a:prstGeom prst="rect">
+            <a:avLst/>
+          </a:prstGeom>
+          <a:noFill/>
+        </p:spPr>
+        <p:txBody>
+          <a:bodyPr wrap="square">
+            <a:spAutoFit/>
+          </a:bodyPr>
+          <a:lstStyle/>
+          <a:p>
+            <a:pPr algn="l"/>
+            <a:r>
+              <a:rPr sz="850" b="1">
+                <a:solidFill>
+                  <a:srgbClr val="C8A840"/>
+                </a:solidFill>
+                <a:latin typeface="メイリオ"/>
+              </a:rPr>
+              <a:t>複数回の確認で精度UP</a:t>
+            </a:r>
+          </a:p>
+        </p:txBody>
+      </p:sp>
+      <p:sp>
+        <p:nvSpPr>
+          <p:cNvPr id="29" name="TextBox 28"/>
+          <p:cNvSpPr txBox="1"/>
+          <p:nvPr/>
+        </p:nvSpPr>
+        <p:spPr>
+          <a:xfrm>
+            <a:off x="3232112" y="3863368"/>
+            <a:ext cx="2560320" cy="780000"/>
+          </a:xfrm>
+          <a:prstGeom prst="rect">
+            <a:avLst/>
+          </a:prstGeom>
+          <a:noFill/>
+        </p:spPr>
+        <p:txBody>
+          <a:bodyPr wrap="square">
+            <a:spAutoFit/>
+          </a:bodyPr>
+          <a:lstStyle/>
+          <a:p>
+            <a:pPr algn="l"/>
+            <a:r>
+              <a:rPr sz="800" b="0">
+                <a:solidFill>
+                  <a:srgbClr val="E8E8F4"/>
+                </a:solidFill>
+                <a:latin typeface="メイリオ"/>
+              </a:rPr>
+              <a:t>単発では偶然もあるため、
+複数BB後のデータを積み上げて
+総合的に判断する。</a:t>
+            </a:r>
+          </a:p>
+        </p:txBody>
+      </p:sp>
+      <p:sp>
+        <p:nvSpPr>
+          <p:cNvPr id="30" name="Rectangle 29"/>
+          <p:cNvSpPr/>
+          <p:nvPr/>
+        </p:nvSpPr>
+        <p:spPr>
+          <a:xfrm>
+            <a:off x="6108192" y="658368"/>
+            <a:ext cx="2633472" cy="360000"/>
+          </a:xfrm>
+          <a:prstGeom prst="rect">
+            <a:avLst/>
+          </a:prstGeom>
+          <a:solidFill>
+            <a:srgbClr val="22AA99"/>
+          </a:solidFill>
+          <a:ln>
+            <a:noFill/>
+          </a:ln>
+        </p:spPr>
+        <p:style>
+          <a:lnRef idx="1">
+            <a:schemeClr val="accent1"/>
+          </a:lnRef>
+          <a:fillRef idx="3">
+            <a:schemeClr val="accent1"/>
+          </a:fillRef>
+          <a:effectRef idx="2">
+            <a:schemeClr val="accent1"/>
+          </a:effectRef>
+          <a:fontRef idx="minor">
+            <a:schemeClr val="lt1"/>
+          </a:fontRef>
+        </p:style>
+        <p:txBody>
+          <a:bodyPr rtlCol="0" anchor="ctr"/>
+          <a:lstStyle/>
+          <a:p>
+            <a:pPr algn="ctr"/>
+          </a:p>
+        </p:txBody>
+      </p:sp>
+      <p:sp>
+        <p:nvSpPr>
+          <p:cNvPr id="31" name="TextBox 30"/>
+          <p:cNvSpPr txBox="1"/>
+          <p:nvPr/>
+        </p:nvSpPr>
+        <p:spPr>
+          <a:xfrm>
+            <a:off x="6138192" y="703368"/>
+            <a:ext cx="2587752" cy="275000"/>
+          </a:xfrm>
+          <a:prstGeom prst="rect">
+            <a:avLst/>
+          </a:prstGeom>
+          <a:noFill/>
+        </p:spPr>
+        <p:txBody>
+          <a:bodyPr wrap="none">
+            <a:spAutoFit/>
+          </a:bodyPr>
+          <a:lstStyle/>
+          <a:p>
+            <a:pPr algn="ctr"/>
+            <a:r>
+              <a:rPr sz="950" b="1">
+                <a:solidFill>
+                  <a:srgbClr val="050818"/>
+                </a:solidFill>
+                <a:latin typeface="メイリオ"/>
+              </a:rPr>
+              <a:t>BB中の演出示唆</a:t>
+            </a:r>
+          </a:p>
+        </p:txBody>
+      </p:sp>
+      <p:sp>
+        <p:nvSpPr>
+          <p:cNvPr id="32" name="Rectangle 31"/>
+          <p:cNvSpPr/>
+          <p:nvPr/>
+        </p:nvSpPr>
+        <p:spPr>
+          <a:xfrm>
+            <a:off x="6108192" y="1018368"/>
+            <a:ext cx="2633472" cy="1210000"/>
+          </a:xfrm>
+          <a:prstGeom prst="rect">
+            <a:avLst/>
+          </a:prstGeom>
+          <a:solidFill>
+            <a:srgbClr val="0C1228"/>
+          </a:solidFill>
+          <a:ln w="6350">
+            <a:solidFill>
+              <a:srgbClr val="22AA99"/>
+            </a:solidFill>
+          </a:ln>
+        </p:spPr>
+        <p:style>
+          <a:lnRef idx="1">
+            <a:schemeClr val="accent1"/>
+          </a:lnRef>
+          <a:fillRef idx="3">
+            <a:schemeClr val="accent1"/>
+          </a:fillRef>
+          <a:effectRef idx="2">
+            <a:schemeClr val="accent1"/>
+          </a:effectRef>
+          <a:fontRef idx="minor">
+            <a:schemeClr val="lt1"/>
+          </a:fontRef>
+        </p:style>
+        <p:txBody>
+          <a:bodyPr rtlCol="0" anchor="ctr"/>
+          <a:lstStyle/>
+          <a:p>
+            <a:pPr algn="ctr"/>
+          </a:p>
+        </p:txBody>
+      </p:sp>
+      <p:sp>
+        <p:nvSpPr>
+          <p:cNvPr id="33" name="TextBox 32"/>
+          <p:cNvSpPr txBox="1"/>
+          <p:nvPr/>
+        </p:nvSpPr>
+        <p:spPr>
+          <a:xfrm>
+            <a:off x="6158192" y="1073368"/>
+            <a:ext cx="2560320" cy="255000"/>
+          </a:xfrm>
+          <a:prstGeom prst="rect">
+            <a:avLst/>
+          </a:prstGeom>
+          <a:noFill/>
+        </p:spPr>
+        <p:txBody>
+          <a:bodyPr wrap="square">
+            <a:spAutoFit/>
+          </a:bodyPr>
+          <a:lstStyle/>
+          <a:p>
+            <a:pPr algn="l"/>
+            <a:r>
+              <a:rPr sz="850" b="1">
+                <a:solidFill>
+                  <a:srgbClr val="22AA99"/>
+                </a:solidFill>
+                <a:latin typeface="メイリオ"/>
+              </a:rPr>
+              <a:t>宿命バトル中のレア役</a:t>
+            </a:r>
+          </a:p>
+        </p:txBody>
+      </p:sp>
+      <p:sp>
+        <p:nvSpPr>
+          <p:cNvPr id="34" name="TextBox 33"/>
+          <p:cNvSpPr txBox="1"/>
+          <p:nvPr/>
+        </p:nvSpPr>
+        <p:spPr>
+          <a:xfrm>
+            <a:off x="6158192" y="1323368"/>
+            <a:ext cx="2560320" cy="780000"/>
+          </a:xfrm>
+          <a:prstGeom prst="rect">
+            <a:avLst/>
+          </a:prstGeom>
+          <a:noFill/>
+        </p:spPr>
+        <p:txBody>
+          <a:bodyPr wrap="square">
+            <a:spAutoFit/>
+          </a:bodyPr>
+          <a:lstStyle/>
+          <a:p>
+            <a:pPr algn="l"/>
+            <a:r>
+              <a:rPr sz="800" b="0">
+                <a:solidFill>
+                  <a:srgbClr val="E8E8F4"/>
+                </a:solidFill>
+                <a:latin typeface="メイリオ"/>
+              </a:rPr>
+              <a:t>小役パート中のレア役出現率に
+設定差。高設定ほど
+宿命バトルに勝ちやすい傾向。</a:t>
+            </a:r>
+          </a:p>
+        </p:txBody>
+      </p:sp>
+      <p:sp>
+        <p:nvSpPr>
+          <p:cNvPr id="35" name="Rectangle 34"/>
+          <p:cNvSpPr/>
+          <p:nvPr/>
+        </p:nvSpPr>
+        <p:spPr>
+          <a:xfrm>
+            <a:off x="6108192" y="2288368"/>
+            <a:ext cx="2633472" cy="1210000"/>
+          </a:xfrm>
+          <a:prstGeom prst="rect">
+            <a:avLst/>
+          </a:prstGeom>
+          <a:solidFill>
+            <a:srgbClr val="101630"/>
+          </a:solidFill>
+          <a:ln w="6350">
+            <a:solidFill>
+              <a:srgbClr val="22AA99"/>
+            </a:solidFill>
+          </a:ln>
+        </p:spPr>
+        <p:style>
+          <a:lnRef idx="1">
+            <a:schemeClr val="accent1"/>
+          </a:lnRef>
+          <a:fillRef idx="3">
+            <a:schemeClr val="accent1"/>
+          </a:fillRef>
+          <a:effectRef idx="2">
+            <a:schemeClr val="accent1"/>
+          </a:effectRef>
+          <a:fontRef idx="minor">
+            <a:schemeClr val="lt1"/>
+          </a:fontRef>
+        </p:style>
+        <p:txBody>
+          <a:bodyPr rtlCol="0" anchor="ctr"/>
+          <a:lstStyle/>
+          <a:p>
+            <a:pPr algn="ctr"/>
+          </a:p>
+        </p:txBody>
+      </p:sp>
+      <p:sp>
+        <p:nvSpPr>
+          <p:cNvPr id="36" name="TextBox 35"/>
+          <p:cNvSpPr txBox="1"/>
+          <p:nvPr/>
+        </p:nvSpPr>
+        <p:spPr>
+          <a:xfrm>
+            <a:off x="6158192" y="2343368"/>
+            <a:ext cx="2560320" cy="255000"/>
+          </a:xfrm>
+          <a:prstGeom prst="rect">
+            <a:avLst/>
+          </a:prstGeom>
+          <a:noFill/>
+        </p:spPr>
+        <p:txBody>
+          <a:bodyPr wrap="square">
+            <a:spAutoFit/>
+          </a:bodyPr>
+          <a:lstStyle/>
+          <a:p>
+            <a:pPr algn="l"/>
+            <a:r>
+              <a:rPr sz="850" b="1">
+                <a:solidFill>
+                  <a:srgbClr val="22AA99"/>
+                </a:solidFill>
+                <a:latin typeface="メイリオ"/>
+              </a:rPr>
+              <a:t>Vストック獲得率</a:t>
+            </a:r>
+          </a:p>
+        </p:txBody>
+      </p:sp>
+      <p:sp>
+        <p:nvSpPr>
+          <p:cNvPr id="37" name="TextBox 36"/>
+          <p:cNvSpPr txBox="1"/>
+          <p:nvPr/>
+        </p:nvSpPr>
+        <p:spPr>
+          <a:xfrm>
+            <a:off x="6158192" y="2593368"/>
+            <a:ext cx="2560320" cy="780000"/>
+          </a:xfrm>
+          <a:prstGeom prst="rect">
+            <a:avLst/>
+          </a:prstGeom>
+          <a:noFill/>
+        </p:spPr>
+        <p:txBody>
+          <a:bodyPr wrap="square">
+            <a:spAutoFit/>
+          </a:bodyPr>
+          <a:lstStyle/>
+          <a:p>
+            <a:pPr algn="l"/>
+            <a:r>
+              <a:rPr sz="800" b="0">
+                <a:solidFill>
+                  <a:srgbClr val="E8E8F4"/>
+                </a:solidFill>
+                <a:latin typeface="メイリオ"/>
+              </a:rPr>
+              <a:t>Vストック取得頻度が高い台は
+高設定の可能性。
+協力ループ発生率も参考に。</a:t>
+            </a:r>
+          </a:p>
+        </p:txBody>
+      </p:sp>
+      <p:sp>
+        <p:nvSpPr>
+          <p:cNvPr id="38" name="Rectangle 37"/>
+          <p:cNvSpPr/>
+          <p:nvPr/>
+        </p:nvSpPr>
+        <p:spPr>
+          <a:xfrm>
+            <a:off x="6108192" y="3558368"/>
+            <a:ext cx="2633472" cy="1210000"/>
+          </a:xfrm>
+          <a:prstGeom prst="rect">
+            <a:avLst/>
+          </a:prstGeom>
+          <a:solidFill>
+            <a:srgbClr val="0C1228"/>
+          </a:solidFill>
+          <a:ln w="6350">
+            <a:solidFill>
+              <a:srgbClr val="22AA99"/>
+            </a:solidFill>
+          </a:ln>
+        </p:spPr>
+        <p:style>
+          <a:lnRef idx="1">
+            <a:schemeClr val="accent1"/>
+          </a:lnRef>
+          <a:fillRef idx="3">
+            <a:schemeClr val="accent1"/>
+          </a:fillRef>
+          <a:effectRef idx="2">
+            <a:schemeClr val="accent1"/>
+          </a:effectRef>
+          <a:fontRef idx="minor">
+            <a:schemeClr val="lt1"/>
+          </a:fontRef>
+        </p:style>
+        <p:txBody>
+          <a:bodyPr rtlCol="0" anchor="ctr"/>
+          <a:lstStyle/>
+          <a:p>
+            <a:pPr algn="ctr"/>
+          </a:p>
+        </p:txBody>
+      </p:sp>
+      <p:sp>
+        <p:nvSpPr>
+          <p:cNvPr id="39" name="TextBox 38"/>
+          <p:cNvSpPr txBox="1"/>
+          <p:nvPr/>
+        </p:nvSpPr>
+        <p:spPr>
+          <a:xfrm>
+            <a:off x="6158192" y="3613368"/>
+            <a:ext cx="2560320" cy="255000"/>
+          </a:xfrm>
+          <a:prstGeom prst="rect">
+            <a:avLst/>
+          </a:prstGeom>
+          <a:noFill/>
+        </p:spPr>
+        <p:txBody>
+          <a:bodyPr wrap="square">
+            <a:spAutoFit/>
+          </a:bodyPr>
+          <a:lstStyle/>
+          <a:p>
+            <a:pPr algn="l"/>
+            <a:r>
+              <a:rPr sz="850" b="1">
+                <a:solidFill>
+                  <a:srgbClr val="22AA99"/>
+                </a:solidFill>
+                <a:latin typeface="メイリオ"/>
+              </a:rPr>
+              <a:t>無想転生チャンス</a:t>
+            </a:r>
+          </a:p>
+        </p:txBody>
+      </p:sp>
+      <p:sp>
+        <p:nvSpPr>
+          <p:cNvPr id="40" name="TextBox 39"/>
+          <p:cNvSpPr txBox="1"/>
+          <p:nvPr/>
+        </p:nvSpPr>
+        <p:spPr>
+          <a:xfrm>
+            <a:off x="6158192" y="3863368"/>
+            <a:ext cx="2560320" cy="780000"/>
+          </a:xfrm>
+          <a:prstGeom prst="rect">
+            <a:avLst/>
+          </a:prstGeom>
+          <a:noFill/>
+        </p:spPr>
+        <p:txBody>
+          <a:bodyPr wrap="square">
+            <a:spAutoFit/>
+          </a:bodyPr>
+          <a:lstStyle/>
+          <a:p>
+            <a:pPr algn="l"/>
+            <a:r>
+              <a:rPr sz="800" b="0">
+                <a:solidFill>
+                  <a:srgbClr val="E8E8F4"/>
+                </a:solidFill>
+                <a:latin typeface="メイリオ"/>
+              </a:rPr>
+              <a:t>無想転生チャンス成功率に
+設定差あり。設定6ほど
+突入しやすい。</a:t>
+            </a:r>
+          </a:p>
+        </p:txBody>
+      </p:sp>
+      <p:sp>
+        <p:nvSpPr>
+          <p:cNvPr id="41" name="TextBox 40"/>
+          <p:cNvSpPr txBox="1"/>
+          <p:nvPr/>
+        </p:nvSpPr>
+        <p:spPr>
+          <a:xfrm>
+            <a:off x="7498079" y="4919472"/>
+            <a:ext cx="1554480" cy="180000"/>
+          </a:xfrm>
+          <a:prstGeom prst="rect">
+            <a:avLst/>
+          </a:prstGeom>
+          <a:noFill/>
+        </p:spPr>
+        <p:txBody>
+          <a:bodyPr wrap="square">
+            <a:spAutoFit/>
+          </a:bodyPr>
+          <a:lstStyle/>
+          <a:p>
+            <a:pPr algn="r"/>
+            <a:r>
+              <a:rPr sz="700" b="0">
+                <a:solidFill>
+                  <a:srgbClr val="8888AA"/>
+                </a:solidFill>
+                <a:latin typeface="メイリオ"/>
+              </a:rPr>
+              <a:t>※ネット解析情報より</a:t>
+            </a:r>
+          </a:p>
+        </p:txBody>
+      </p:sp>
+    </p:spTree>
+  </p:cSld>
+  <p:clrMapOvr>
+    <a:masterClrMapping/>
+  </p:clrMapOvr>
+</p:sld>
+</file>
+
+<file path=ppt/slides/slide8.xml><?xml version="1.0" encoding="utf-8"?>
+<p:sld xmlns:a="http://schemas.openxmlformats.org/drawingml/2006/main" xmlns:p="http://schemas.openxmlformats.org/presentationml/2006/main" xmlns:r="http://schemas.openxmlformats.org/officeDocument/2006/relationships">
+  <p:cSld>
+    <p:spTree>
+      <p:nvGrpSpPr>
+        <p:cNvPr id="1" name=""/>
+        <p:cNvGrpSpPr/>
+        <p:nvPr/>
+      </p:nvGrpSpPr>
+      <p:grpSpPr/>
+      <p:pic>
+        <p:nvPicPr>
+          <p:cNvPr id="2" name="Picture 1" descr="image.png"/>
+          <p:cNvPicPr>
+            <a:picLocks noChangeAspect="1"/>
+          </p:cNvPicPr>
+          <p:nvPr/>
+        </p:nvPicPr>
+        <p:blipFill>
+          <a:blip r:embed="rId2"/>
+          <a:stretch>
+            <a:fillRect/>
+          </a:stretch>
+        </p:blipFill>
+        <p:spPr>
+          <a:xfrm>
+            <a:off x="0" y="0"/>
+            <a:ext cx="9144000" cy="5143500"/>
+          </a:xfrm>
+          <a:prstGeom prst="rect">
+            <a:avLst/>
+          </a:prstGeom>
+        </p:spPr>
+      </p:pic>
+      <p:sp>
+        <p:nvSpPr>
+          <p:cNvPr id="3" name="Rectangle 2"/>
+          <p:cNvSpPr/>
+          <p:nvPr/>
+        </p:nvSpPr>
+        <p:spPr>
+          <a:xfrm>
+            <a:off x="0" y="0"/>
+            <a:ext cx="9144000" cy="530352"/>
+          </a:xfrm>
+          <a:prstGeom prst="rect">
+            <a:avLst/>
+          </a:prstGeom>
+          <a:solidFill>
+            <a:srgbClr val="0C1228"/>
+          </a:solidFill>
+          <a:ln>
+            <a:noFill/>
+          </a:ln>
+        </p:spPr>
+        <p:style>
+          <a:lnRef idx="1">
+            <a:schemeClr val="accent1"/>
+          </a:lnRef>
+          <a:fillRef idx="3">
+            <a:schemeClr val="accent1"/>
+          </a:fillRef>
+          <a:effectRef idx="2">
+            <a:schemeClr val="accent1"/>
+          </a:effectRef>
+          <a:fontRef idx="minor">
+            <a:schemeClr val="lt1"/>
+          </a:fontRef>
+        </p:style>
+        <p:txBody>
+          <a:bodyPr rtlCol="0" anchor="ctr"/>
+          <a:lstStyle/>
+          <a:p>
+            <a:pPr algn="ctr"/>
+          </a:p>
+        </p:txBody>
+      </p:sp>
+      <p:sp>
+        <p:nvSpPr>
+          <p:cNvPr id="4" name="Rectangle 3"/>
+          <p:cNvSpPr/>
+          <p:nvPr/>
+        </p:nvSpPr>
+        <p:spPr>
+          <a:xfrm>
+            <a:off x="0" y="0"/>
+            <a:ext cx="45000" cy="530352"/>
+          </a:xfrm>
+          <a:prstGeom prst="rect">
+            <a:avLst/>
+          </a:prstGeom>
+          <a:solidFill>
+            <a:srgbClr val="BB1111"/>
+          </a:solidFill>
+          <a:ln>
+            <a:noFill/>
+          </a:ln>
+        </p:spPr>
+        <p:style>
+          <a:lnRef idx="1">
+            <a:schemeClr val="accent1"/>
+          </a:lnRef>
+          <a:fillRef idx="3">
+            <a:schemeClr val="accent1"/>
+          </a:fillRef>
+          <a:effectRef idx="2">
+            <a:schemeClr val="accent1"/>
+          </a:effectRef>
+          <a:fontRef idx="minor">
+            <a:schemeClr val="lt1"/>
+          </a:fontRef>
+        </p:style>
+        <p:txBody>
+          <a:bodyPr rtlCol="0" anchor="ctr"/>
+          <a:lstStyle/>
+          <a:p>
+            <a:pPr algn="ctr"/>
+          </a:p>
+        </p:txBody>
+      </p:sp>
+      <p:sp>
+        <p:nvSpPr>
+          <p:cNvPr id="5" name="TextBox 4"/>
+          <p:cNvSpPr txBox="1"/>
+          <p:nvPr/>
+        </p:nvSpPr>
+        <p:spPr>
+          <a:xfrm>
+            <a:off x="137160" y="28000"/>
+            <a:ext cx="7772400" cy="410000"/>
+          </a:xfrm>
+          <a:prstGeom prst="rect">
+            <a:avLst/>
+          </a:prstGeom>
+          <a:noFill/>
+        </p:spPr>
+        <p:txBody>
+          <a:bodyPr wrap="square">
+            <a:spAutoFit/>
+          </a:bodyPr>
+          <a:lstStyle/>
+          <a:p>
+            <a:pPr algn="l"/>
+            <a:r>
+              <a:rPr sz="1400" b="1">
+                <a:solidFill>
+                  <a:srgbClr val="C8A840"/>
+                </a:solidFill>
+                <a:latin typeface="游明朝"/>
+              </a:rPr>
+              <a:t>まとめ ── 設計から学べること</a:t>
+            </a:r>
+          </a:p>
+        </p:txBody>
+      </p:sp>
+      <p:sp>
+        <p:nvSpPr>
+          <p:cNvPr id="6" name="TextBox 5"/>
+          <p:cNvSpPr txBox="1"/>
+          <p:nvPr/>
+        </p:nvSpPr>
+        <p:spPr>
+          <a:xfrm>
+            <a:off x="8046720" y="45000"/>
+            <a:ext cx="914400" cy="340000"/>
+          </a:xfrm>
+          <a:prstGeom prst="rect">
+            <a:avLst/>
+          </a:prstGeom>
+          <a:noFill/>
+        </p:spPr>
+        <p:txBody>
+          <a:bodyPr wrap="square">
+            <a:spAutoFit/>
+          </a:bodyPr>
+          <a:lstStyle/>
+          <a:p>
+            <a:pPr algn="r"/>
+            <a:r>
+              <a:rPr sz="800" b="0">
+                <a:solidFill>
+                  <a:srgbClr val="8888AA"/>
+                </a:solidFill>
+                <a:latin typeface="メイリオ"/>
+              </a:rPr>
+              <a:t>8/8</a:t>
             </a:r>
           </a:p>
         </p:txBody>
